--- a/lessons/lesson-06/slides.pptx
+++ b/lessons/lesson-06/slides.pptx
@@ -2,32 +2,32 @@
 <file path=ppt/presentation.xml><?xml version="1.0" encoding="utf-8"?>
 <p:presentation xmlns:p="http://schemas.openxmlformats.org/presentationml/2006/main">
   <p:sldMasterIdLst>
-    <p:sldMasterId xmlns:r="http://schemas.openxmlformats.org/officeDocument/2006/relationships" id="2147483648" r:id="R91438a80f33a4bf6"/>
+    <p:sldMasterId xmlns:r="http://schemas.openxmlformats.org/officeDocument/2006/relationships" id="2147483648" r:id="R95838b4e428e4fb9"/>
   </p:sldMasterIdLst>
   <p:notesMasterIdLst>
-    <p:notesMasterId xmlns:r="http://schemas.openxmlformats.org/officeDocument/2006/relationships" r:id="Rd40a7e99995d4dff"/>
+    <p:notesMasterId xmlns:r="http://schemas.openxmlformats.org/officeDocument/2006/relationships" r:id="Rbb7eef7ddd2448ae"/>
   </p:notesMasterIdLst>
   <p:sldIdLst>
-    <p:sldId xmlns:r="http://schemas.openxmlformats.org/officeDocument/2006/relationships" id="256" r:id="Rd1f2639c63a6402a"/>
-    <p:sldId xmlns:r="http://schemas.openxmlformats.org/officeDocument/2006/relationships" id="257" r:id="Re0d023a2af754d74"/>
-    <p:sldId xmlns:r="http://schemas.openxmlformats.org/officeDocument/2006/relationships" id="258" r:id="Rc8f2eb16d5c0486e"/>
-    <p:sldId xmlns:r="http://schemas.openxmlformats.org/officeDocument/2006/relationships" id="259" r:id="R66c292d981f24605"/>
-    <p:sldId xmlns:r="http://schemas.openxmlformats.org/officeDocument/2006/relationships" id="260" r:id="R659afb4cfe92462e"/>
-    <p:sldId xmlns:r="http://schemas.openxmlformats.org/officeDocument/2006/relationships" id="261" r:id="R776c9c737c6d45e6"/>
-    <p:sldId xmlns:r="http://schemas.openxmlformats.org/officeDocument/2006/relationships" id="262" r:id="Rada751ec4b8040b0"/>
-    <p:sldId xmlns:r="http://schemas.openxmlformats.org/officeDocument/2006/relationships" id="263" r:id="R8d86a782a28f49ec"/>
-    <p:sldId xmlns:r="http://schemas.openxmlformats.org/officeDocument/2006/relationships" id="264" r:id="R8156f8cbeb804b40"/>
-    <p:sldId xmlns:r="http://schemas.openxmlformats.org/officeDocument/2006/relationships" id="265" r:id="R0b1c0ae4711b4b29"/>
-    <p:sldId xmlns:r="http://schemas.openxmlformats.org/officeDocument/2006/relationships" id="266" r:id="R91c4c702077b4dea"/>
-    <p:sldId xmlns:r="http://schemas.openxmlformats.org/officeDocument/2006/relationships" id="267" r:id="Rcbdac95b78b64248"/>
-    <p:sldId xmlns:r="http://schemas.openxmlformats.org/officeDocument/2006/relationships" id="268" r:id="R780d3161b3994b94"/>
-    <p:sldId xmlns:r="http://schemas.openxmlformats.org/officeDocument/2006/relationships" id="269" r:id="R6b68f2ee389142bc"/>
-    <p:sldId xmlns:r="http://schemas.openxmlformats.org/officeDocument/2006/relationships" id="270" r:id="R927650d7412c4514"/>
-    <p:sldId xmlns:r="http://schemas.openxmlformats.org/officeDocument/2006/relationships" id="271" r:id="R3a4fd862d40d43fc"/>
-    <p:sldId xmlns:r="http://schemas.openxmlformats.org/officeDocument/2006/relationships" id="272" r:id="Re97b68ab42b64287"/>
-    <p:sldId xmlns:r="http://schemas.openxmlformats.org/officeDocument/2006/relationships" id="273" r:id="R74b4d8c5b776459d"/>
-    <p:sldId xmlns:r="http://schemas.openxmlformats.org/officeDocument/2006/relationships" id="274" r:id="R0cba286e26c844cf"/>
-    <p:sldId xmlns:r="http://schemas.openxmlformats.org/officeDocument/2006/relationships" id="275" r:id="Rf39d97c515c341a5"/>
+    <p:sldId xmlns:r="http://schemas.openxmlformats.org/officeDocument/2006/relationships" id="256" r:id="Rdb13033627e04619"/>
+    <p:sldId xmlns:r="http://schemas.openxmlformats.org/officeDocument/2006/relationships" id="257" r:id="Rfc70dd78cc5e4de6"/>
+    <p:sldId xmlns:r="http://schemas.openxmlformats.org/officeDocument/2006/relationships" id="258" r:id="R30b6ae8f59734183"/>
+    <p:sldId xmlns:r="http://schemas.openxmlformats.org/officeDocument/2006/relationships" id="259" r:id="R8aa93150040c41c7"/>
+    <p:sldId xmlns:r="http://schemas.openxmlformats.org/officeDocument/2006/relationships" id="260" r:id="R63ba31038fc14f64"/>
+    <p:sldId xmlns:r="http://schemas.openxmlformats.org/officeDocument/2006/relationships" id="261" r:id="R1dbd2705f9754914"/>
+    <p:sldId xmlns:r="http://schemas.openxmlformats.org/officeDocument/2006/relationships" id="262" r:id="R98ea63066ae8463a"/>
+    <p:sldId xmlns:r="http://schemas.openxmlformats.org/officeDocument/2006/relationships" id="263" r:id="R2bc390c147214064"/>
+    <p:sldId xmlns:r="http://schemas.openxmlformats.org/officeDocument/2006/relationships" id="264" r:id="R3b625a989d374515"/>
+    <p:sldId xmlns:r="http://schemas.openxmlformats.org/officeDocument/2006/relationships" id="265" r:id="Rc9db28ca118443b3"/>
+    <p:sldId xmlns:r="http://schemas.openxmlformats.org/officeDocument/2006/relationships" id="266" r:id="R5f10c521c6064e32"/>
+    <p:sldId xmlns:r="http://schemas.openxmlformats.org/officeDocument/2006/relationships" id="267" r:id="R93e3a8c4dc9f456d"/>
+    <p:sldId xmlns:r="http://schemas.openxmlformats.org/officeDocument/2006/relationships" id="268" r:id="R77ed1f16011c4b6f"/>
+    <p:sldId xmlns:r="http://schemas.openxmlformats.org/officeDocument/2006/relationships" id="269" r:id="Rc01a7cdfdf784814"/>
+    <p:sldId xmlns:r="http://schemas.openxmlformats.org/officeDocument/2006/relationships" id="270" r:id="Rc9765a90103f4c13"/>
+    <p:sldId xmlns:r="http://schemas.openxmlformats.org/officeDocument/2006/relationships" id="271" r:id="R5594f1e351f34c31"/>
+    <p:sldId xmlns:r="http://schemas.openxmlformats.org/officeDocument/2006/relationships" id="272" r:id="Rf076f8884adc4d4b"/>
+    <p:sldId xmlns:r="http://schemas.openxmlformats.org/officeDocument/2006/relationships" id="273" r:id="Re50d14790216497a"/>
+    <p:sldId xmlns:r="http://schemas.openxmlformats.org/officeDocument/2006/relationships" id="274" r:id="Rdc7ed7219aa64499"/>
+    <p:sldId xmlns:r="http://schemas.openxmlformats.org/officeDocument/2006/relationships" id="275" r:id="Rbc033eb956ab4e9e"/>
   </p:sldIdLst>
   <p:sldSz cx="12192000" cy="6858000"/>
   <p:notesSz cx="6858000" cy="9144000"/>
@@ -2293,7 +2293,7 @@
           <p:nvPr/>
         </p:nvPicPr>
         <p:blipFill>
-          <a:blip xmlns:r="http://schemas.openxmlformats.org/officeDocument/2006/relationships" xmlns:a="http://schemas.openxmlformats.org/drawingml/2006/main" r:embed="Re29472d6d7b14842">
+          <a:blip xmlns:r="http://schemas.openxmlformats.org/officeDocument/2006/relationships" xmlns:a="http://schemas.openxmlformats.org/drawingml/2006/main" r:embed="Rcfcba201a2a94476">
             <a:duotone>
               <a:prstClr val="black"/>
               <a:schemeClr val="accent1">
@@ -2471,7 +2471,7 @@
           <p:nvPr/>
         </p:nvPicPr>
         <p:blipFill rotWithShape="1">
-          <a:blip xmlns:r="http://schemas.openxmlformats.org/officeDocument/2006/relationships" xmlns:a="http://schemas.openxmlformats.org/drawingml/2006/main" r:embed="R64bdcfc87e874f61"/>
+          <a:blip xmlns:r="http://schemas.openxmlformats.org/officeDocument/2006/relationships" xmlns:a="http://schemas.openxmlformats.org/drawingml/2006/main" r:embed="R77663a3b6ed04833"/>
           <a:srcRect xmlns:a="http://schemas.openxmlformats.org/drawingml/2006/main" l="74359" t="0" r="1346" b="0"/>
           <a:stretch xmlns:a="http://schemas.openxmlformats.org/drawingml/2006/main"/>
         </p:blipFill>
@@ -2494,7 +2494,7 @@
           <p:nvPr/>
         </p:nvPicPr>
         <p:blipFill rotWithShape="1">
-          <a:blip xmlns:r="http://schemas.openxmlformats.org/officeDocument/2006/relationships" xmlns:a="http://schemas.openxmlformats.org/drawingml/2006/main" r:embed="Rcbd79f7997424a95">
+          <a:blip xmlns:r="http://schemas.openxmlformats.org/officeDocument/2006/relationships" xmlns:a="http://schemas.openxmlformats.org/drawingml/2006/main" r:embed="R37a80d93728643af">
             <a:alphaModFix amt="35000"/>
           </a:blip>
           <a:srcRect xmlns:a="http://schemas.openxmlformats.org/drawingml/2006/main" l="0" t="9831" r="0" b="36385"/>
@@ -2756,7 +2756,7 @@
           <p:nvPr/>
         </p:nvPicPr>
         <p:blipFill>
-          <a:blip xmlns:r="http://schemas.openxmlformats.org/officeDocument/2006/relationships" xmlns:a="http://schemas.openxmlformats.org/drawingml/2006/main" r:embed="R69c0be63a844423a"/>
+          <a:blip xmlns:r="http://schemas.openxmlformats.org/officeDocument/2006/relationships" xmlns:a="http://schemas.openxmlformats.org/drawingml/2006/main" r:embed="R8587008354fd4cb9"/>
           <a:srcRect xmlns:a="http://schemas.openxmlformats.org/drawingml/2006/main" l="0" t="0" r="54251" b="0"/>
           <a:stretch xmlns:a="http://schemas.openxmlformats.org/drawingml/2006/main"/>
         </p:blipFill>
@@ -3013,7 +3013,7 @@
           <p:nvPr/>
         </p:nvPicPr>
         <p:blipFill rotWithShape="1">
-          <a:blip xmlns:r="http://schemas.openxmlformats.org/officeDocument/2006/relationships" xmlns:a="http://schemas.openxmlformats.org/drawingml/2006/main" r:embed="Reab508102f78435b"/>
+          <a:blip xmlns:r="http://schemas.openxmlformats.org/officeDocument/2006/relationships" xmlns:a="http://schemas.openxmlformats.org/drawingml/2006/main" r:embed="R71b4dec399ac49a6"/>
           <a:srcRect xmlns:a="http://schemas.openxmlformats.org/drawingml/2006/main" l="0" t="0" r="1346" b="0"/>
           <a:stretch xmlns:a="http://schemas.openxmlformats.org/drawingml/2006/main"/>
         </p:blipFill>
@@ -3196,7 +3196,7 @@
           <p:nvPr/>
         </p:nvPicPr>
         <p:blipFill>
-          <a:blip xmlns:r="http://schemas.openxmlformats.org/officeDocument/2006/relationships" xmlns:a="http://schemas.openxmlformats.org/drawingml/2006/main" r:embed="R7efd3e2401894877"/>
+          <a:blip xmlns:r="http://schemas.openxmlformats.org/officeDocument/2006/relationships" xmlns:a="http://schemas.openxmlformats.org/drawingml/2006/main" r:embed="R2da6254caf5e4033"/>
           <a:stretch xmlns:a="http://schemas.openxmlformats.org/drawingml/2006/main">
             <a:fillRect l="0" t="0" r="0" b="0"/>
           </a:stretch>
@@ -3292,7 +3292,7 @@
           <p:nvPr/>
         </p:nvPicPr>
         <p:blipFill>
-          <a:blip xmlns:r="http://schemas.openxmlformats.org/officeDocument/2006/relationships" xmlns:a="http://schemas.openxmlformats.org/drawingml/2006/main" r:embed="R7b5acde2946543ff">
+          <a:blip xmlns:r="http://schemas.openxmlformats.org/officeDocument/2006/relationships" xmlns:a="http://schemas.openxmlformats.org/drawingml/2006/main" r:embed="R3e54b1c732194122">
             <a:duotone>
               <a:prstClr val="black"/>
               <a:schemeClr val="accent1">
@@ -3459,7 +3459,7 @@
           <p:nvPr/>
         </p:nvPicPr>
         <p:blipFill rotWithShape="1">
-          <a:blip xmlns:r="http://schemas.openxmlformats.org/officeDocument/2006/relationships" xmlns:a="http://schemas.openxmlformats.org/drawingml/2006/main" r:embed="R61d7e896ce1f420d">
+          <a:blip xmlns:r="http://schemas.openxmlformats.org/officeDocument/2006/relationships" xmlns:a="http://schemas.openxmlformats.org/drawingml/2006/main" r:embed="R64045fca50254047">
             <a:alphaModFix amt="20000"/>
             <a:duotone>
               <a:schemeClr val="accent4">
@@ -3557,10 +3557,10 @@
   </p:cSld>
   <p:clrMap bg1="lt1" tx1="dk1" bg2="lt2" tx2="dk2" accent1="accent1" accent2="accent2" accent3="accent3" accent4="accent4" accent5="accent5" accent6="accent6" hlink="hlink" folHlink="folHlink"/>
   <p:sldLayoutIdLst>
-    <p:sldLayoutId xmlns:r="http://schemas.openxmlformats.org/officeDocument/2006/relationships" id="2147483649" r:id="Rd774ebe437674de0"/>
-    <p:sldLayoutId xmlns:r="http://schemas.openxmlformats.org/officeDocument/2006/relationships" id="2147483650" r:id="R85acbd123a7e4024"/>
-    <p:sldLayoutId xmlns:r="http://schemas.openxmlformats.org/officeDocument/2006/relationships" id="2147483651" r:id="R754765c87315458e"/>
-    <p:sldLayoutId xmlns:r="http://schemas.openxmlformats.org/officeDocument/2006/relationships" id="2147483652" r:id="R6eea5ddc1fdd4802"/>
+    <p:sldLayoutId xmlns:r="http://schemas.openxmlformats.org/officeDocument/2006/relationships" id="2147483649" r:id="R9826f27f1c1d4839"/>
+    <p:sldLayoutId xmlns:r="http://schemas.openxmlformats.org/officeDocument/2006/relationships" id="2147483650" r:id="R836b007514524acf"/>
+    <p:sldLayoutId xmlns:r="http://schemas.openxmlformats.org/officeDocument/2006/relationships" id="2147483651" r:id="R3ee7fa4b9b2e44a0"/>
+    <p:sldLayoutId xmlns:r="http://schemas.openxmlformats.org/officeDocument/2006/relationships" id="2147483652" r:id="Rc147b9a8f5464ed6"/>
   </p:sldLayoutIdLst>
   <p:hf hdr="0" ftr="0" dt="0"/>
   <p:txStyles>
@@ -4359,7 +4359,7 @@
           <p:cNvPr id="6" name="p10-h1-h">
             <a:extLst xmlns:a="http://schemas.openxmlformats.org/drawingml/2006/main">
               <a:ext uri="{FF2B5EF4-FFF2-40B4-BE49-F238E27FC236}">
-                <a16:creationId xmlns:a16="http://schemas.microsoft.com/office/drawing/2014/main" id="{439EBD4E-1A47-406B-B7A3-2AF54CD1D19B}"/>
+                <a16:creationId xmlns:a16="http://schemas.microsoft.com/office/drawing/2014/main" id="{C112B67F-6864-4517-8E78-3B2DBF8CDCF1}"/>
               </a:ext>
             </a:extLst>
           </p:cNvPr>
@@ -4416,7 +4416,7 @@
           <p:cNvPr id="7" name="p10-h1-d">
             <a:extLst xmlns:a="http://schemas.openxmlformats.org/drawingml/2006/main">
               <a:ext uri="{FF2B5EF4-FFF2-40B4-BE49-F238E27FC236}">
-                <a16:creationId xmlns:a16="http://schemas.microsoft.com/office/drawing/2014/main" id="{672BDC23-F76B-43C4-BC59-1148CB083C74}"/>
+                <a16:creationId xmlns:a16="http://schemas.microsoft.com/office/drawing/2014/main" id="{9C918CBE-6F67-4B4F-B886-74C82A3FEA7E}"/>
               </a:ext>
             </a:extLst>
           </p:cNvPr>
@@ -4527,7 +4527,7 @@
           <p:cNvPr id="8" name="p10-h2-h">
             <a:extLst xmlns:a="http://schemas.openxmlformats.org/drawingml/2006/main">
               <a:ext uri="{FF2B5EF4-FFF2-40B4-BE49-F238E27FC236}">
-                <a16:creationId xmlns:a16="http://schemas.microsoft.com/office/drawing/2014/main" id="{5C706671-3FE7-40B8-AE3A-CDD10374B0A4}"/>
+                <a16:creationId xmlns:a16="http://schemas.microsoft.com/office/drawing/2014/main" id="{B90118D9-8D9A-4316-9CBD-BD3F7DED3DB6}"/>
               </a:ext>
             </a:extLst>
           </p:cNvPr>
@@ -4584,7 +4584,7 @@
           <p:cNvPr id="9" name="p10-h2-d">
             <a:extLst xmlns:a="http://schemas.openxmlformats.org/drawingml/2006/main">
               <a:ext uri="{FF2B5EF4-FFF2-40B4-BE49-F238E27FC236}">
-                <a16:creationId xmlns:a16="http://schemas.microsoft.com/office/drawing/2014/main" id="{92BC376D-A63A-44D9-B128-20F234EA3066}"/>
+                <a16:creationId xmlns:a16="http://schemas.microsoft.com/office/drawing/2014/main" id="{2B4171CF-5E6D-4D92-9F07-32EB3B8F2715}"/>
               </a:ext>
             </a:extLst>
           </p:cNvPr>
@@ -4695,7 +4695,7 @@
           <p:cNvPr id="10" name="p10-test-h">
             <a:extLst xmlns:a="http://schemas.openxmlformats.org/drawingml/2006/main">
               <a:ext uri="{FF2B5EF4-FFF2-40B4-BE49-F238E27FC236}">
-                <a16:creationId xmlns:a16="http://schemas.microsoft.com/office/drawing/2014/main" id="{955FEA59-DE3D-463D-93AD-F7F39431A4AD}"/>
+                <a16:creationId xmlns:a16="http://schemas.microsoft.com/office/drawing/2014/main" id="{FD171520-9172-4794-8DD2-8D396C9FA23C}"/>
               </a:ext>
             </a:extLst>
           </p:cNvPr>
@@ -4752,7 +4752,7 @@
           <p:cNvPr id="11" name="p10-test-d">
             <a:extLst xmlns:a="http://schemas.openxmlformats.org/drawingml/2006/main">
               <a:ext uri="{FF2B5EF4-FFF2-40B4-BE49-F238E27FC236}">
-                <a16:creationId xmlns:a16="http://schemas.microsoft.com/office/drawing/2014/main" id="{D913FD28-83C8-4384-A655-3FD687B07A1A}"/>
+                <a16:creationId xmlns:a16="http://schemas.microsoft.com/office/drawing/2014/main" id="{509597E4-15BF-408A-B590-B36B1ADD7ABA}"/>
               </a:ext>
             </a:extLst>
           </p:cNvPr>
@@ -4863,7 +4863,7 @@
           <p:cNvPr id="12" name="p10-a1">
             <a:extLst xmlns:a="http://schemas.openxmlformats.org/drawingml/2006/main">
               <a:ext uri="{FF2B5EF4-FFF2-40B4-BE49-F238E27FC236}">
-                <a16:creationId xmlns:a16="http://schemas.microsoft.com/office/drawing/2014/main" id="{C4C8DE57-E03D-486B-8AA4-EBB74039EDAC}"/>
+                <a16:creationId xmlns:a16="http://schemas.microsoft.com/office/drawing/2014/main" id="{4108167C-E820-49CC-8625-924F63676256}"/>
               </a:ext>
             </a:extLst>
           </p:cNvPr>
@@ -4920,7 +4920,7 @@
           <p:cNvPr id="13" name="p10-a2">
             <a:extLst xmlns:a="http://schemas.openxmlformats.org/drawingml/2006/main">
               <a:ext uri="{FF2B5EF4-FFF2-40B4-BE49-F238E27FC236}">
-                <a16:creationId xmlns:a16="http://schemas.microsoft.com/office/drawing/2014/main" id="{CBBD2287-DF8D-48C5-8A19-AF69E1C6028A}"/>
+                <a16:creationId xmlns:a16="http://schemas.microsoft.com/office/drawing/2014/main" id="{D79A1E44-F275-4621-825D-A5BC1838F373}"/>
               </a:ext>
             </a:extLst>
           </p:cNvPr>
@@ -4977,7 +4977,7 @@
           <p:cNvPr id="14" name="p10-result">
             <a:extLst xmlns:a="http://schemas.openxmlformats.org/drawingml/2006/main">
               <a:ext uri="{FF2B5EF4-FFF2-40B4-BE49-F238E27FC236}">
-                <a16:creationId xmlns:a16="http://schemas.microsoft.com/office/drawing/2014/main" id="{B9B4DEE9-E797-49C8-B79C-BAA220D6E81B}"/>
+                <a16:creationId xmlns:a16="http://schemas.microsoft.com/office/drawing/2014/main" id="{55145C8E-F77C-4DC8-A5F6-437793C39AAC}"/>
               </a:ext>
             </a:extLst>
           </p:cNvPr>
@@ -5128,7 +5128,7 @@
           <p:cNvPr id="6" name="p11-0-h">
             <a:extLst xmlns:a="http://schemas.openxmlformats.org/drawingml/2006/main">
               <a:ext uri="{FF2B5EF4-FFF2-40B4-BE49-F238E27FC236}">
-                <a16:creationId xmlns:a16="http://schemas.microsoft.com/office/drawing/2014/main" id="{88E99D86-550A-4DB1-99CE-67126E65CF14}"/>
+                <a16:creationId xmlns:a16="http://schemas.microsoft.com/office/drawing/2014/main" id="{EAB7CCD0-2073-43BB-984F-8D9167FBF46F}"/>
               </a:ext>
             </a:extLst>
           </p:cNvPr>
@@ -5185,7 +5185,7 @@
           <p:cNvPr id="7" name="p11-0-d">
             <a:extLst xmlns:a="http://schemas.openxmlformats.org/drawingml/2006/main">
               <a:ext uri="{FF2B5EF4-FFF2-40B4-BE49-F238E27FC236}">
-                <a16:creationId xmlns:a16="http://schemas.microsoft.com/office/drawing/2014/main" id="{A7A4B2B6-940E-4444-8C28-D98D0B73C576}"/>
+                <a16:creationId xmlns:a16="http://schemas.microsoft.com/office/drawing/2014/main" id="{EBAD6A0A-5E6B-4D87-B910-0A45F60B9FB4}"/>
               </a:ext>
             </a:extLst>
           </p:cNvPr>
@@ -5248,7 +5248,7 @@
           <p:cNvPr id="8" name="p11-1-h">
             <a:extLst xmlns:a="http://schemas.openxmlformats.org/drawingml/2006/main">
               <a:ext uri="{FF2B5EF4-FFF2-40B4-BE49-F238E27FC236}">
-                <a16:creationId xmlns:a16="http://schemas.microsoft.com/office/drawing/2014/main" id="{BE2C7E3D-B10B-4552-8EF0-8FFC30428DD3}"/>
+                <a16:creationId xmlns:a16="http://schemas.microsoft.com/office/drawing/2014/main" id="{76B36347-06B8-451F-BBA9-1302A1111D66}"/>
               </a:ext>
             </a:extLst>
           </p:cNvPr>
@@ -5305,7 +5305,7 @@
           <p:cNvPr id="9" name="p11-1-d">
             <a:extLst xmlns:a="http://schemas.openxmlformats.org/drawingml/2006/main">
               <a:ext uri="{FF2B5EF4-FFF2-40B4-BE49-F238E27FC236}">
-                <a16:creationId xmlns:a16="http://schemas.microsoft.com/office/drawing/2014/main" id="{0862160D-F38A-4DA8-8026-6E1EF0EBBC8B}"/>
+                <a16:creationId xmlns:a16="http://schemas.microsoft.com/office/drawing/2014/main" id="{9A789A86-EE11-4F1F-82EB-9C79B1DD8427}"/>
               </a:ext>
             </a:extLst>
           </p:cNvPr>
@@ -5368,7 +5368,7 @@
           <p:cNvPr id="10" name="p11-2-h">
             <a:extLst xmlns:a="http://schemas.openxmlformats.org/drawingml/2006/main">
               <a:ext uri="{FF2B5EF4-FFF2-40B4-BE49-F238E27FC236}">
-                <a16:creationId xmlns:a16="http://schemas.microsoft.com/office/drawing/2014/main" id="{00944415-A3C3-4007-B118-6E4F20DF401A}"/>
+                <a16:creationId xmlns:a16="http://schemas.microsoft.com/office/drawing/2014/main" id="{CA610AD2-46D6-4A60-AD52-7152B0899FBD}"/>
               </a:ext>
             </a:extLst>
           </p:cNvPr>
@@ -5425,7 +5425,7 @@
           <p:cNvPr id="11" name="p11-2-d">
             <a:extLst xmlns:a="http://schemas.openxmlformats.org/drawingml/2006/main">
               <a:ext uri="{FF2B5EF4-FFF2-40B4-BE49-F238E27FC236}">
-                <a16:creationId xmlns:a16="http://schemas.microsoft.com/office/drawing/2014/main" id="{D0590C0B-5C10-41ED-97D2-0D287BA28DAA}"/>
+                <a16:creationId xmlns:a16="http://schemas.microsoft.com/office/drawing/2014/main" id="{839709A1-25C4-4DE5-98F9-135AB8C4F539}"/>
               </a:ext>
             </a:extLst>
           </p:cNvPr>
@@ -5488,7 +5488,7 @@
           <p:cNvPr id="12" name="p11-3-h">
             <a:extLst xmlns:a="http://schemas.openxmlformats.org/drawingml/2006/main">
               <a:ext uri="{FF2B5EF4-FFF2-40B4-BE49-F238E27FC236}">
-                <a16:creationId xmlns:a16="http://schemas.microsoft.com/office/drawing/2014/main" id="{2AEC39F6-F6F2-4C20-BC11-B2CA55AAC6C3}"/>
+                <a16:creationId xmlns:a16="http://schemas.microsoft.com/office/drawing/2014/main" id="{04D87592-F6B1-4503-8E21-BF93D10EA4D3}"/>
               </a:ext>
             </a:extLst>
           </p:cNvPr>
@@ -5545,7 +5545,7 @@
           <p:cNvPr id="13" name="p11-3-d">
             <a:extLst xmlns:a="http://schemas.openxmlformats.org/drawingml/2006/main">
               <a:ext uri="{FF2B5EF4-FFF2-40B4-BE49-F238E27FC236}">
-                <a16:creationId xmlns:a16="http://schemas.microsoft.com/office/drawing/2014/main" id="{E391268F-F8A6-4375-9128-FFB5E2E609BE}"/>
+                <a16:creationId xmlns:a16="http://schemas.microsoft.com/office/drawing/2014/main" id="{FD84E5BF-AE02-4237-A36B-4DA0EA60BC8B}"/>
               </a:ext>
             </a:extLst>
           </p:cNvPr>
@@ -5608,7 +5608,7 @@
           <p:cNvPr id="14" name="p11-loop">
             <a:extLst xmlns:a="http://schemas.openxmlformats.org/drawingml/2006/main">
               <a:ext uri="{FF2B5EF4-FFF2-40B4-BE49-F238E27FC236}">
-                <a16:creationId xmlns:a16="http://schemas.microsoft.com/office/drawing/2014/main" id="{78524559-8FAF-437D-B971-09041C970A37}"/>
+                <a16:creationId xmlns:a16="http://schemas.microsoft.com/office/drawing/2014/main" id="{431F1C63-EEF0-4B88-AE4E-D400C8A345CC}"/>
               </a:ext>
             </a:extLst>
           </p:cNvPr>
@@ -5753,7 +5753,7 @@
           <p:cNvPr id="6" name="p12-n0">
             <a:extLst xmlns:a="http://schemas.openxmlformats.org/drawingml/2006/main">
               <a:ext uri="{FF2B5EF4-FFF2-40B4-BE49-F238E27FC236}">
-                <a16:creationId xmlns:a16="http://schemas.microsoft.com/office/drawing/2014/main" id="{54BF52D4-168B-471F-94FF-1C96328037B4}"/>
+                <a16:creationId xmlns:a16="http://schemas.microsoft.com/office/drawing/2014/main" id="{E07CC29F-BC4F-40F0-8E3B-A226744C0799}"/>
               </a:ext>
             </a:extLst>
           </p:cNvPr>
@@ -5810,7 +5810,7 @@
           <p:cNvPr id="7" name="p12-h0">
             <a:extLst xmlns:a="http://schemas.openxmlformats.org/drawingml/2006/main">
               <a:ext uri="{FF2B5EF4-FFF2-40B4-BE49-F238E27FC236}">
-                <a16:creationId xmlns:a16="http://schemas.microsoft.com/office/drawing/2014/main" id="{984F422A-6DCF-493A-9AA1-570AA39E194A}"/>
+                <a16:creationId xmlns:a16="http://schemas.microsoft.com/office/drawing/2014/main" id="{37FA2CD5-A016-49A9-9786-E92AA8FAF8FB}"/>
               </a:ext>
             </a:extLst>
           </p:cNvPr>
@@ -5867,7 +5867,7 @@
           <p:cNvPr id="8" name="p12-d0">
             <a:extLst xmlns:a="http://schemas.openxmlformats.org/drawingml/2006/main">
               <a:ext uri="{FF2B5EF4-FFF2-40B4-BE49-F238E27FC236}">
-                <a16:creationId xmlns:a16="http://schemas.microsoft.com/office/drawing/2014/main" id="{65BA271A-0D1E-4F7A-9574-C9CEB66A5B0C}"/>
+                <a16:creationId xmlns:a16="http://schemas.microsoft.com/office/drawing/2014/main" id="{BB298543-D736-4A51-98FA-D6ED025804A5}"/>
               </a:ext>
             </a:extLst>
           </p:cNvPr>
@@ -5926,7 +5926,7 @@
           <p:cNvPr id="9" name="p12-n1">
             <a:extLst xmlns:a="http://schemas.openxmlformats.org/drawingml/2006/main">
               <a:ext uri="{FF2B5EF4-FFF2-40B4-BE49-F238E27FC236}">
-                <a16:creationId xmlns:a16="http://schemas.microsoft.com/office/drawing/2014/main" id="{2688F41B-EFFA-46E2-BE3B-80A786460218}"/>
+                <a16:creationId xmlns:a16="http://schemas.microsoft.com/office/drawing/2014/main" id="{76FAAD73-12B8-4B76-82BB-F77AAA42BCBE}"/>
               </a:ext>
             </a:extLst>
           </p:cNvPr>
@@ -5983,7 +5983,7 @@
           <p:cNvPr id="10" name="p12-h1">
             <a:extLst xmlns:a="http://schemas.openxmlformats.org/drawingml/2006/main">
               <a:ext uri="{FF2B5EF4-FFF2-40B4-BE49-F238E27FC236}">
-                <a16:creationId xmlns:a16="http://schemas.microsoft.com/office/drawing/2014/main" id="{FBDE25B2-D277-46BE-BEFB-3A511D6187DE}"/>
+                <a16:creationId xmlns:a16="http://schemas.microsoft.com/office/drawing/2014/main" id="{E6FB4C60-C859-44DB-A9EB-504A701A02F5}"/>
               </a:ext>
             </a:extLst>
           </p:cNvPr>
@@ -6040,7 +6040,7 @@
           <p:cNvPr id="11" name="p12-d1">
             <a:extLst xmlns:a="http://schemas.openxmlformats.org/drawingml/2006/main">
               <a:ext uri="{FF2B5EF4-FFF2-40B4-BE49-F238E27FC236}">
-                <a16:creationId xmlns:a16="http://schemas.microsoft.com/office/drawing/2014/main" id="{E950B33C-3AEB-40BD-B897-AB909AF58325}"/>
+                <a16:creationId xmlns:a16="http://schemas.microsoft.com/office/drawing/2014/main" id="{8F68276F-69CA-4427-BE03-8107C916D7FB}"/>
               </a:ext>
             </a:extLst>
           </p:cNvPr>
@@ -6099,7 +6099,7 @@
           <p:cNvPr id="12" name="p12-n2">
             <a:extLst xmlns:a="http://schemas.openxmlformats.org/drawingml/2006/main">
               <a:ext uri="{FF2B5EF4-FFF2-40B4-BE49-F238E27FC236}">
-                <a16:creationId xmlns:a16="http://schemas.microsoft.com/office/drawing/2014/main" id="{FD7BF6BF-F6B6-4699-A439-3EBCE08052AC}"/>
+                <a16:creationId xmlns:a16="http://schemas.microsoft.com/office/drawing/2014/main" id="{399E3CDF-D23B-44CD-8A27-AFC21C4C7B89}"/>
               </a:ext>
             </a:extLst>
           </p:cNvPr>
@@ -6156,7 +6156,7 @@
           <p:cNvPr id="13" name="p12-h2">
             <a:extLst xmlns:a="http://schemas.openxmlformats.org/drawingml/2006/main">
               <a:ext uri="{FF2B5EF4-FFF2-40B4-BE49-F238E27FC236}">
-                <a16:creationId xmlns:a16="http://schemas.microsoft.com/office/drawing/2014/main" id="{0F017285-CBE1-46D8-BF36-800FCA99BB7A}"/>
+                <a16:creationId xmlns:a16="http://schemas.microsoft.com/office/drawing/2014/main" id="{D89C4FEF-2B1F-40E9-AB13-9858461278F9}"/>
               </a:ext>
             </a:extLst>
           </p:cNvPr>
@@ -6213,7 +6213,7 @@
           <p:cNvPr id="14" name="p12-d2">
             <a:extLst xmlns:a="http://schemas.openxmlformats.org/drawingml/2006/main">
               <a:ext uri="{FF2B5EF4-FFF2-40B4-BE49-F238E27FC236}">
-                <a16:creationId xmlns:a16="http://schemas.microsoft.com/office/drawing/2014/main" id="{4BF4D2D4-2538-4FD3-A491-5BCD4D63BBCC}"/>
+                <a16:creationId xmlns:a16="http://schemas.microsoft.com/office/drawing/2014/main" id="{E529FBC6-A40F-4C0F-9ECC-8CF77B85DA7E}"/>
               </a:ext>
             </a:extLst>
           </p:cNvPr>
@@ -6272,7 +6272,7 @@
           <p:cNvPr id="15" name="p12-n3">
             <a:extLst xmlns:a="http://schemas.openxmlformats.org/drawingml/2006/main">
               <a:ext uri="{FF2B5EF4-FFF2-40B4-BE49-F238E27FC236}">
-                <a16:creationId xmlns:a16="http://schemas.microsoft.com/office/drawing/2014/main" id="{F6246A17-B74A-45A7-8CF7-4FF186DF7A10}"/>
+                <a16:creationId xmlns:a16="http://schemas.microsoft.com/office/drawing/2014/main" id="{5FE6F8B6-5C4E-4FB7-924B-A523654CF897}"/>
               </a:ext>
             </a:extLst>
           </p:cNvPr>
@@ -6329,7 +6329,7 @@
           <p:cNvPr id="16" name="p12-h3">
             <a:extLst xmlns:a="http://schemas.openxmlformats.org/drawingml/2006/main">
               <a:ext uri="{FF2B5EF4-FFF2-40B4-BE49-F238E27FC236}">
-                <a16:creationId xmlns:a16="http://schemas.microsoft.com/office/drawing/2014/main" id="{41832BAC-274A-4507-81A9-2DD7A40202CA}"/>
+                <a16:creationId xmlns:a16="http://schemas.microsoft.com/office/drawing/2014/main" id="{880DDA82-25D6-4562-9C25-E773D32779A2}"/>
               </a:ext>
             </a:extLst>
           </p:cNvPr>
@@ -6386,7 +6386,7 @@
           <p:cNvPr id="17" name="p12-d3">
             <a:extLst xmlns:a="http://schemas.openxmlformats.org/drawingml/2006/main">
               <a:ext uri="{FF2B5EF4-FFF2-40B4-BE49-F238E27FC236}">
-                <a16:creationId xmlns:a16="http://schemas.microsoft.com/office/drawing/2014/main" id="{02AFD06C-1F62-44BA-B8E4-020015803EEE}"/>
+                <a16:creationId xmlns:a16="http://schemas.microsoft.com/office/drawing/2014/main" id="{EB2E7ECA-94F9-4731-A532-17FB1070A399}"/>
               </a:ext>
             </a:extLst>
           </p:cNvPr>
@@ -6445,7 +6445,7 @@
           <p:cNvPr id="18" name="p12-bottom">
             <a:extLst xmlns:a="http://schemas.openxmlformats.org/drawingml/2006/main">
               <a:ext uri="{FF2B5EF4-FFF2-40B4-BE49-F238E27FC236}">
-                <a16:creationId xmlns:a16="http://schemas.microsoft.com/office/drawing/2014/main" id="{1C311409-F543-431B-B67F-6C2046E49BDB}"/>
+                <a16:creationId xmlns:a16="http://schemas.microsoft.com/office/drawing/2014/main" id="{5730FD6E-C7E3-4169-B08F-561C72B6422E}"/>
               </a:ext>
             </a:extLst>
           </p:cNvPr>
@@ -6590,7 +6590,7 @@
           <p:cNvPr id="6" name="p13-virtual">
             <a:extLst xmlns:a="http://schemas.openxmlformats.org/drawingml/2006/main">
               <a:ext uri="{FF2B5EF4-FFF2-40B4-BE49-F238E27FC236}">
-                <a16:creationId xmlns:a16="http://schemas.microsoft.com/office/drawing/2014/main" id="{4611EC1C-ED7D-478B-9612-4EFFE1D7586A}"/>
+                <a16:creationId xmlns:a16="http://schemas.microsoft.com/office/drawing/2014/main" id="{B255E6B2-8710-4E07-93FC-8029F625CCD0}"/>
               </a:ext>
             </a:extLst>
           </p:cNvPr>
@@ -6647,7 +6647,7 @@
           <p:cNvPr id="7" name="p13-0-h">
             <a:extLst xmlns:a="http://schemas.openxmlformats.org/drawingml/2006/main">
               <a:ext uri="{FF2B5EF4-FFF2-40B4-BE49-F238E27FC236}">
-                <a16:creationId xmlns:a16="http://schemas.microsoft.com/office/drawing/2014/main" id="{B6803275-BA38-40F3-AB50-DFD1B6527BFD}"/>
+                <a16:creationId xmlns:a16="http://schemas.microsoft.com/office/drawing/2014/main" id="{9F94C346-3742-4B3A-A7D8-038E8077AF4C}"/>
               </a:ext>
             </a:extLst>
           </p:cNvPr>
@@ -6704,7 +6704,7 @@
           <p:cNvPr id="8" name="p13-0-d">
             <a:extLst xmlns:a="http://schemas.openxmlformats.org/drawingml/2006/main">
               <a:ext uri="{FF2B5EF4-FFF2-40B4-BE49-F238E27FC236}">
-                <a16:creationId xmlns:a16="http://schemas.microsoft.com/office/drawing/2014/main" id="{BB3EDB83-A1E6-40DE-9544-393957EDA6C6}"/>
+                <a16:creationId xmlns:a16="http://schemas.microsoft.com/office/drawing/2014/main" id="{3C95CE52-7D19-45DA-BCBB-F56C94031E0B}"/>
               </a:ext>
             </a:extLst>
           </p:cNvPr>
@@ -6815,7 +6815,7 @@
           <p:cNvPr id="9" name="p13-1-h">
             <a:extLst xmlns:a="http://schemas.openxmlformats.org/drawingml/2006/main">
               <a:ext uri="{FF2B5EF4-FFF2-40B4-BE49-F238E27FC236}">
-                <a16:creationId xmlns:a16="http://schemas.microsoft.com/office/drawing/2014/main" id="{B38E4962-071F-4A95-9113-084F5DABDAE7}"/>
+                <a16:creationId xmlns:a16="http://schemas.microsoft.com/office/drawing/2014/main" id="{F5E136FA-A16D-40D2-AD99-C61EDB4BFD9A}"/>
               </a:ext>
             </a:extLst>
           </p:cNvPr>
@@ -6872,7 +6872,7 @@
           <p:cNvPr id="10" name="p13-1-d">
             <a:extLst xmlns:a="http://schemas.openxmlformats.org/drawingml/2006/main">
               <a:ext uri="{FF2B5EF4-FFF2-40B4-BE49-F238E27FC236}">
-                <a16:creationId xmlns:a16="http://schemas.microsoft.com/office/drawing/2014/main" id="{3A4110B9-8A75-4401-AB4D-2FA64791B704}"/>
+                <a16:creationId xmlns:a16="http://schemas.microsoft.com/office/drawing/2014/main" id="{1D8196EC-92DC-4723-9CCE-168B8AEDA416}"/>
               </a:ext>
             </a:extLst>
           </p:cNvPr>
@@ -6959,7 +6959,7 @@
           <p:cNvPr id="11" name="p13-2-h">
             <a:extLst xmlns:a="http://schemas.openxmlformats.org/drawingml/2006/main">
               <a:ext uri="{FF2B5EF4-FFF2-40B4-BE49-F238E27FC236}">
-                <a16:creationId xmlns:a16="http://schemas.microsoft.com/office/drawing/2014/main" id="{DD5CA11F-7A66-4A91-AD97-8A05B15BB816}"/>
+                <a16:creationId xmlns:a16="http://schemas.microsoft.com/office/drawing/2014/main" id="{4BB0B72B-3625-451D-95D0-6C145EDB0875}"/>
               </a:ext>
             </a:extLst>
           </p:cNvPr>
@@ -7016,7 +7016,7 @@
           <p:cNvPr id="12" name="p13-2-d">
             <a:extLst xmlns:a="http://schemas.openxmlformats.org/drawingml/2006/main">
               <a:ext uri="{FF2B5EF4-FFF2-40B4-BE49-F238E27FC236}">
-                <a16:creationId xmlns:a16="http://schemas.microsoft.com/office/drawing/2014/main" id="{B020A3A8-7530-4085-ADC9-05AC8155B312}"/>
+                <a16:creationId xmlns:a16="http://schemas.microsoft.com/office/drawing/2014/main" id="{0B1A345B-92BD-462A-AE69-0C2330F6ABB0}"/>
               </a:ext>
             </a:extLst>
           </p:cNvPr>
@@ -7127,7 +7127,7 @@
           <p:cNvPr id="13" name="p13-3-h">
             <a:extLst xmlns:a="http://schemas.openxmlformats.org/drawingml/2006/main">
               <a:ext uri="{FF2B5EF4-FFF2-40B4-BE49-F238E27FC236}">
-                <a16:creationId xmlns:a16="http://schemas.microsoft.com/office/drawing/2014/main" id="{4AD168A9-07DF-4EDE-B7BF-783BA00B8481}"/>
+                <a16:creationId xmlns:a16="http://schemas.microsoft.com/office/drawing/2014/main" id="{2756BA41-B0F7-42EB-922E-DA9A70E9F16B}"/>
               </a:ext>
             </a:extLst>
           </p:cNvPr>
@@ -7184,7 +7184,7 @@
           <p:cNvPr id="14" name="p13-3-d">
             <a:extLst xmlns:a="http://schemas.openxmlformats.org/drawingml/2006/main">
               <a:ext uri="{FF2B5EF4-FFF2-40B4-BE49-F238E27FC236}">
-                <a16:creationId xmlns:a16="http://schemas.microsoft.com/office/drawing/2014/main" id="{2FF27A56-13C1-40BA-9894-4D04D4098121}"/>
+                <a16:creationId xmlns:a16="http://schemas.microsoft.com/office/drawing/2014/main" id="{FCB3A255-9FB3-4D5E-B597-FD13BCC41867}"/>
               </a:ext>
             </a:extLst>
           </p:cNvPr>
@@ -7295,7 +7295,7 @@
           <p:cNvPr id="15" name="p13-a0">
             <a:extLst xmlns:a="http://schemas.openxmlformats.org/drawingml/2006/main">
               <a:ext uri="{FF2B5EF4-FFF2-40B4-BE49-F238E27FC236}">
-                <a16:creationId xmlns:a16="http://schemas.microsoft.com/office/drawing/2014/main" id="{E77C3D55-3238-4AA3-A518-A200A58FF1CF}"/>
+                <a16:creationId xmlns:a16="http://schemas.microsoft.com/office/drawing/2014/main" id="{B32425DF-58EA-4B83-8DE8-3755DABD0F0E}"/>
               </a:ext>
             </a:extLst>
           </p:cNvPr>
@@ -7348,7 +7348,7 @@
           <p:cNvPr id="16" name="p13-a1">
             <a:extLst xmlns:a="http://schemas.openxmlformats.org/drawingml/2006/main">
               <a:ext uri="{FF2B5EF4-FFF2-40B4-BE49-F238E27FC236}">
-                <a16:creationId xmlns:a16="http://schemas.microsoft.com/office/drawing/2014/main" id="{3311877F-360C-47DB-859A-5C62B75A1150}"/>
+                <a16:creationId xmlns:a16="http://schemas.microsoft.com/office/drawing/2014/main" id="{6C80E3BE-70FE-4EAE-851F-C880108A0A67}"/>
               </a:ext>
             </a:extLst>
           </p:cNvPr>
@@ -7401,7 +7401,7 @@
           <p:cNvPr id="17" name="p13-a2">
             <a:extLst xmlns:a="http://schemas.openxmlformats.org/drawingml/2006/main">
               <a:ext uri="{FF2B5EF4-FFF2-40B4-BE49-F238E27FC236}">
-                <a16:creationId xmlns:a16="http://schemas.microsoft.com/office/drawing/2014/main" id="{2E23F510-2C06-4258-9AE9-5B88A881D2D4}"/>
+                <a16:creationId xmlns:a16="http://schemas.microsoft.com/office/drawing/2014/main" id="{9D46DA23-BB17-4F63-B5AA-5631C4F929EA}"/>
               </a:ext>
             </a:extLst>
           </p:cNvPr>
@@ -7454,7 +7454,7 @@
           <p:cNvPr id="18" name="p13-bottom">
             <a:extLst xmlns:a="http://schemas.openxmlformats.org/drawingml/2006/main">
               <a:ext uri="{FF2B5EF4-FFF2-40B4-BE49-F238E27FC236}">
-                <a16:creationId xmlns:a16="http://schemas.microsoft.com/office/drawing/2014/main" id="{E6C21C21-EBE7-4D27-86DE-8F6E818991CE}"/>
+                <a16:creationId xmlns:a16="http://schemas.microsoft.com/office/drawing/2014/main" id="{D51A9F74-0CD0-44F2-B79A-89D800E9250F}"/>
               </a:ext>
             </a:extLst>
           </p:cNvPr>
@@ -7599,7 +7599,7 @@
           <p:cNvPr id="6" name="p14-n0">
             <a:extLst xmlns:a="http://schemas.openxmlformats.org/drawingml/2006/main">
               <a:ext uri="{FF2B5EF4-FFF2-40B4-BE49-F238E27FC236}">
-                <a16:creationId xmlns:a16="http://schemas.microsoft.com/office/drawing/2014/main" id="{22B04D9D-0F48-401F-BF30-21AF253D8D86}"/>
+                <a16:creationId xmlns:a16="http://schemas.microsoft.com/office/drawing/2014/main" id="{45E94757-A767-481F-9CDA-E025A49DE858}"/>
               </a:ext>
             </a:extLst>
           </p:cNvPr>
@@ -7656,7 +7656,7 @@
           <p:cNvPr id="7" name="p14-g0">
             <a:extLst xmlns:a="http://schemas.openxmlformats.org/drawingml/2006/main">
               <a:ext uri="{FF2B5EF4-FFF2-40B4-BE49-F238E27FC236}">
-                <a16:creationId xmlns:a16="http://schemas.microsoft.com/office/drawing/2014/main" id="{9FB38B42-2AEE-4399-B5CD-D8460F0C2748}"/>
+                <a16:creationId xmlns:a16="http://schemas.microsoft.com/office/drawing/2014/main" id="{EFE7B06C-FC81-47F1-9B66-5682C5EE2124}"/>
               </a:ext>
             </a:extLst>
           </p:cNvPr>
@@ -7719,7 +7719,7 @@
           <p:cNvPr id="8" name="p14-n1">
             <a:extLst xmlns:a="http://schemas.openxmlformats.org/drawingml/2006/main">
               <a:ext uri="{FF2B5EF4-FFF2-40B4-BE49-F238E27FC236}">
-                <a16:creationId xmlns:a16="http://schemas.microsoft.com/office/drawing/2014/main" id="{9024143F-5B23-48E9-9674-B711D4211B03}"/>
+                <a16:creationId xmlns:a16="http://schemas.microsoft.com/office/drawing/2014/main" id="{048E770B-C6F5-48A8-9AF2-26BAD89C4A10}"/>
               </a:ext>
             </a:extLst>
           </p:cNvPr>
@@ -7776,7 +7776,7 @@
           <p:cNvPr id="9" name="p14-g1">
             <a:extLst xmlns:a="http://schemas.openxmlformats.org/drawingml/2006/main">
               <a:ext uri="{FF2B5EF4-FFF2-40B4-BE49-F238E27FC236}">
-                <a16:creationId xmlns:a16="http://schemas.microsoft.com/office/drawing/2014/main" id="{B7003572-4195-437F-8D50-5A543FFA4912}"/>
+                <a16:creationId xmlns:a16="http://schemas.microsoft.com/office/drawing/2014/main" id="{B5E6B6C9-E891-4711-9E94-293611A61895}"/>
               </a:ext>
             </a:extLst>
           </p:cNvPr>
@@ -7839,7 +7839,7 @@
           <p:cNvPr id="10" name="p14-n2">
             <a:extLst xmlns:a="http://schemas.openxmlformats.org/drawingml/2006/main">
               <a:ext uri="{FF2B5EF4-FFF2-40B4-BE49-F238E27FC236}">
-                <a16:creationId xmlns:a16="http://schemas.microsoft.com/office/drawing/2014/main" id="{29894BF4-9465-41EF-9EB0-14F82A8BA6A7}"/>
+                <a16:creationId xmlns:a16="http://schemas.microsoft.com/office/drawing/2014/main" id="{0B9FFF52-A1B7-4F39-A9F8-03AB457BDB99}"/>
               </a:ext>
             </a:extLst>
           </p:cNvPr>
@@ -7896,7 +7896,7 @@
           <p:cNvPr id="11" name="p14-g2">
             <a:extLst xmlns:a="http://schemas.openxmlformats.org/drawingml/2006/main">
               <a:ext uri="{FF2B5EF4-FFF2-40B4-BE49-F238E27FC236}">
-                <a16:creationId xmlns:a16="http://schemas.microsoft.com/office/drawing/2014/main" id="{FF50FC95-C628-4A84-9636-9A66F830E778}"/>
+                <a16:creationId xmlns:a16="http://schemas.microsoft.com/office/drawing/2014/main" id="{D7F934DA-2DDE-4241-833E-CD236FBAE816}"/>
               </a:ext>
             </a:extLst>
           </p:cNvPr>
@@ -7908,126 +7908,6 @@
         <p:spPr>
           <a:xfrm xmlns:a="http://schemas.openxmlformats.org/drawingml/2006/main">
             <a:off x="1076325" y="2085975"/>
-            <a:ext cx="5095875" cy="609600"/>
-          </a:xfrm>
-          <a:prstGeom xmlns:a="http://schemas.openxmlformats.org/drawingml/2006/main" prst="roundRect">
-            <a:avLst>
-              <a:gd name="adj" fmla="val 12500"/>
-            </a:avLst>
-          </a:prstGeom>
-          <a:solidFill xmlns:a="http://schemas.openxmlformats.org/drawingml/2006/main">
-            <a:srgbClr val="F3F6F7"/>
-          </a:solidFill>
-          <a:ln xmlns:a="http://schemas.openxmlformats.org/drawingml/2006/main" w="9525">
-            <a:solidFill>
-              <a:srgbClr val="D6DDE2"/>
-            </a:solidFill>
-            <a:prstDash val="solid"/>
-          </a:ln>
-        </p:spPr>
-        <p:txBody>
-          <a:bodyPr xmlns:a="http://schemas.openxmlformats.org/drawingml/2006/main" lIns="76200" tIns="38100" rIns="76200" bIns="38100" anchor="ctr"/>
-          <a:lstStyle xmlns:a="http://schemas.openxmlformats.org/drawingml/2006/main"/>
-          <a:p xmlns:a="http://schemas.openxmlformats.org/drawingml/2006/main">
-            <a:pPr algn="ctr">
-              <a:lnSpc>
-                <a:spcPct val="102000"/>
-              </a:lnSpc>
-              <a:buNone/>
-              <a:defRPr sz="1275" b="1">
-                <a:solidFill>
-                  <a:srgbClr val="263746"/>
-                </a:solidFill>
-              </a:defRPr>
-            </a:pPr>
-            <a:r>
-              <a:rPr sz="1275" b="1">
-                <a:solidFill>
-                  <a:srgbClr val="263746"/>
-                </a:solidFill>
-                <a:latin typeface="Microsoft YaHei"/>
-                <a:ea typeface="Microsoft YaHei"/>
-                <a:cs typeface="Microsoft YaHei"/>
-              </a:rPr>
-              <a:t>AI 初始地图 + ≥2 原文位置 + 错误/过度概括/遗漏或已检查风险 + 人工判断</a:t>
-            </a:r>
-          </a:p>
-        </p:txBody>
-      </p:sp>
-      <p:sp>
-        <p:nvSpPr>
-          <p:cNvPr id="12" name="p14-n3">
-            <a:extLst xmlns:a="http://schemas.openxmlformats.org/drawingml/2006/main">
-              <a:ext uri="{FF2B5EF4-FFF2-40B4-BE49-F238E27FC236}">
-                <a16:creationId xmlns:a16="http://schemas.microsoft.com/office/drawing/2014/main" id="{456A4B90-5958-4C83-A978-C273E627B729}"/>
-              </a:ext>
-            </a:extLst>
-          </p:cNvPr>
-          <p:cNvSpPr>
-            <a:spLocks xmlns:a="http://schemas.openxmlformats.org/drawingml/2006/main" noGrp="1"/>
-          </p:cNvSpPr>
-          <p:nvPr/>
-        </p:nvSpPr>
-        <p:spPr>
-          <a:xfrm xmlns:a="http://schemas.openxmlformats.org/drawingml/2006/main">
-            <a:off x="6334125" y="2152650"/>
-            <a:ext cx="438150" cy="438150"/>
-          </a:xfrm>
-          <a:prstGeom xmlns:a="http://schemas.openxmlformats.org/drawingml/2006/main" prst="roundRect">
-            <a:avLst>
-              <a:gd name="adj" fmla="val 17391"/>
-            </a:avLst>
-          </a:prstGeom>
-          <a:solidFill xmlns:a="http://schemas.openxmlformats.org/drawingml/2006/main">
-            <a:srgbClr val="18354E"/>
-          </a:solidFill>
-          <a:ln xmlns:a="http://schemas.openxmlformats.org/drawingml/2006/main" w="0">
-            <a:noFill/>
-            <a:prstDash val="solid"/>
-          </a:ln>
-        </p:spPr>
-        <p:txBody>
-          <a:bodyPr xmlns:a="http://schemas.openxmlformats.org/drawingml/2006/main" lIns="76200" tIns="38100" rIns="76200" bIns="38100" anchor="ctr"/>
-          <a:lstStyle xmlns:a="http://schemas.openxmlformats.org/drawingml/2006/main"/>
-          <a:p xmlns:a="http://schemas.openxmlformats.org/drawingml/2006/main">
-            <a:pPr algn="ctr">
-              <a:defRPr sz="1350" b="1">
-                <a:solidFill>
-                  <a:srgbClr val="FFFFFF"/>
-                </a:solidFill>
-              </a:defRPr>
-            </a:pPr>
-            <a:r>
-              <a:rPr sz="1350" b="1">
-                <a:solidFill>
-                  <a:srgbClr val="FFFFFF"/>
-                </a:solidFill>
-                <a:latin typeface="Microsoft YaHei"/>
-                <a:ea typeface="Microsoft YaHei"/>
-                <a:cs typeface="Microsoft YaHei"/>
-              </a:rPr>
-              <a:t>4</a:t>
-            </a:r>
-          </a:p>
-        </p:txBody>
-      </p:sp>
-      <p:sp>
-        <p:nvSpPr>
-          <p:cNvPr id="13" name="p14-g3">
-            <a:extLst xmlns:a="http://schemas.openxmlformats.org/drawingml/2006/main">
-              <a:ext uri="{FF2B5EF4-FFF2-40B4-BE49-F238E27FC236}">
-                <a16:creationId xmlns:a16="http://schemas.microsoft.com/office/drawing/2014/main" id="{AC016DAA-2643-491D-9BC8-80F778EEC52F}"/>
-              </a:ext>
-            </a:extLst>
-          </p:cNvPr>
-          <p:cNvSpPr>
-            <a:spLocks xmlns:a="http://schemas.openxmlformats.org/drawingml/2006/main" noGrp="1"/>
-          </p:cNvSpPr>
-          <p:nvPr/>
-        </p:nvSpPr>
-        <p:spPr>
-          <a:xfrm xmlns:a="http://schemas.openxmlformats.org/drawingml/2006/main">
-            <a:off x="6886575" y="2085975"/>
             <a:ext cx="5095875" cy="609600"/>
           </a:xfrm>
           <a:prstGeom xmlns:a="http://schemas.openxmlformats.org/drawingml/2006/main" prst="roundRect">
@@ -8069,28 +7949,28 @@
                 <a:ea typeface="Microsoft YaHei"/>
                 <a:cs typeface="Microsoft YaHei"/>
               </a:rPr>
-              <a:t>证据地图：直接 / 补充 / 冲突 / 空白</a:t>
-            </a:r>
-          </a:p>
-        </p:txBody>
-      </p:sp>
-      <p:sp>
-        <p:nvSpPr>
-          <p:cNvPr id="14" name="p14-n4">
-            <a:extLst xmlns:a="http://schemas.openxmlformats.org/drawingml/2006/main">
-              <a:ext uri="{FF2B5EF4-FFF2-40B4-BE49-F238E27FC236}">
-                <a16:creationId xmlns:a16="http://schemas.microsoft.com/office/drawing/2014/main" id="{8C94BE4E-58F5-4363-83F6-943D45F4C299}"/>
-              </a:ext>
-            </a:extLst>
-          </p:cNvPr>
-          <p:cNvSpPr>
-            <a:spLocks xmlns:a="http://schemas.openxmlformats.org/drawingml/2006/main" noGrp="1"/>
-          </p:cNvSpPr>
-          <p:nvPr/>
-        </p:nvSpPr>
-        <p:spPr>
-          <a:xfrm xmlns:a="http://schemas.openxmlformats.org/drawingml/2006/main">
-            <a:off x="523875" y="3257550"/>
+              <a:t>AI 初始地图 + ≥2 原文位置 + 错误/过度概括/遗漏或已检查风险 + 人工判断</a:t>
+            </a:r>
+          </a:p>
+        </p:txBody>
+      </p:sp>
+      <p:sp>
+        <p:nvSpPr>
+          <p:cNvPr id="12" name="p14-n3">
+            <a:extLst xmlns:a="http://schemas.openxmlformats.org/drawingml/2006/main">
+              <a:ext uri="{FF2B5EF4-FFF2-40B4-BE49-F238E27FC236}">
+                <a16:creationId xmlns:a16="http://schemas.microsoft.com/office/drawing/2014/main" id="{1284B0E7-3007-48EF-B8D7-57F8C5F54EFC}"/>
+              </a:ext>
+            </a:extLst>
+          </p:cNvPr>
+          <p:cNvSpPr>
+            <a:spLocks xmlns:a="http://schemas.openxmlformats.org/drawingml/2006/main" noGrp="1"/>
+          </p:cNvSpPr>
+          <p:nvPr/>
+        </p:nvSpPr>
+        <p:spPr>
+          <a:xfrm xmlns:a="http://schemas.openxmlformats.org/drawingml/2006/main">
+            <a:off x="6334125" y="2152650"/>
             <a:ext cx="438150" cy="438150"/>
           </a:xfrm>
           <a:prstGeom xmlns:a="http://schemas.openxmlformats.org/drawingml/2006/main" prst="roundRect">
@@ -8099,7 +7979,7 @@
             </a:avLst>
           </a:prstGeom>
           <a:solidFill xmlns:a="http://schemas.openxmlformats.org/drawingml/2006/main">
-            <a:srgbClr val="C8161E"/>
+            <a:srgbClr val="18354E"/>
           </a:solidFill>
           <a:ln xmlns:a="http://schemas.openxmlformats.org/drawingml/2006/main" w="0">
             <a:noFill/>
@@ -8126,28 +8006,28 @@
                 <a:ea typeface="Microsoft YaHei"/>
                 <a:cs typeface="Microsoft YaHei"/>
               </a:rPr>
-              <a:t>5</a:t>
-            </a:r>
-          </a:p>
-        </p:txBody>
-      </p:sp>
-      <p:sp>
-        <p:nvSpPr>
-          <p:cNvPr id="15" name="p14-g4">
-            <a:extLst xmlns:a="http://schemas.openxmlformats.org/drawingml/2006/main">
-              <a:ext uri="{FF2B5EF4-FFF2-40B4-BE49-F238E27FC236}">
-                <a16:creationId xmlns:a16="http://schemas.microsoft.com/office/drawing/2014/main" id="{B4EE748A-6DB2-40D9-8A92-D22D9B4EAF27}"/>
-              </a:ext>
-            </a:extLst>
-          </p:cNvPr>
-          <p:cNvSpPr>
-            <a:spLocks xmlns:a="http://schemas.openxmlformats.org/drawingml/2006/main" noGrp="1"/>
-          </p:cNvSpPr>
-          <p:nvPr/>
-        </p:nvSpPr>
-        <p:spPr>
-          <a:xfrm xmlns:a="http://schemas.openxmlformats.org/drawingml/2006/main">
-            <a:off x="1076325" y="3190875"/>
+              <a:t>4</a:t>
+            </a:r>
+          </a:p>
+        </p:txBody>
+      </p:sp>
+      <p:sp>
+        <p:nvSpPr>
+          <p:cNvPr id="13" name="p14-g3">
+            <a:extLst xmlns:a="http://schemas.openxmlformats.org/drawingml/2006/main">
+              <a:ext uri="{FF2B5EF4-FFF2-40B4-BE49-F238E27FC236}">
+                <a16:creationId xmlns:a16="http://schemas.microsoft.com/office/drawing/2014/main" id="{0DFDDC10-8319-48AD-8831-6345022F8A8C}"/>
+              </a:ext>
+            </a:extLst>
+          </p:cNvPr>
+          <p:cNvSpPr>
+            <a:spLocks xmlns:a="http://schemas.openxmlformats.org/drawingml/2006/main" noGrp="1"/>
+          </p:cNvSpPr>
+          <p:nvPr/>
+        </p:nvSpPr>
+        <p:spPr>
+          <a:xfrm xmlns:a="http://schemas.openxmlformats.org/drawingml/2006/main">
+            <a:off x="6886575" y="2085975"/>
             <a:ext cx="5095875" cy="609600"/>
           </a:xfrm>
           <a:prstGeom xmlns:a="http://schemas.openxmlformats.org/drawingml/2006/main" prst="roundRect">
@@ -8156,7 +8036,7 @@
             </a:avLst>
           </a:prstGeom>
           <a:solidFill xmlns:a="http://schemas.openxmlformats.org/drawingml/2006/main">
-            <a:srgbClr val="F8E9EA"/>
+            <a:srgbClr val="F3F6F7"/>
           </a:solidFill>
           <a:ln xmlns:a="http://schemas.openxmlformats.org/drawingml/2006/main" w="9525">
             <a:solidFill>
@@ -8176,41 +8056,41 @@
               <a:buNone/>
               <a:defRPr sz="1350" b="1">
                 <a:solidFill>
-                  <a:srgbClr val="C8161E"/>
+                  <a:srgbClr val="263746"/>
                 </a:solidFill>
               </a:defRPr>
             </a:pPr>
             <a:r>
               <a:rPr sz="1350" b="1">
                 <a:solidFill>
-                  <a:srgbClr val="C8161E"/>
-                </a:solidFill>
-                <a:latin typeface="Microsoft YaHei"/>
-                <a:ea typeface="Microsoft YaHei"/>
-                <a:cs typeface="Microsoft YaHei"/>
-              </a:rPr>
-              <a:t>问题含范围、非例、≥1 可证伪命题</a:t>
-            </a:r>
-          </a:p>
-        </p:txBody>
-      </p:sp>
-      <p:sp>
-        <p:nvSpPr>
-          <p:cNvPr id="16" name="p14-n5">
-            <a:extLst xmlns:a="http://schemas.openxmlformats.org/drawingml/2006/main">
-              <a:ext uri="{FF2B5EF4-FFF2-40B4-BE49-F238E27FC236}">
-                <a16:creationId xmlns:a16="http://schemas.microsoft.com/office/drawing/2014/main" id="{B0A7AE17-C79C-4FB1-831D-852E68D957B4}"/>
-              </a:ext>
-            </a:extLst>
-          </p:cNvPr>
-          <p:cNvSpPr>
-            <a:spLocks xmlns:a="http://schemas.openxmlformats.org/drawingml/2006/main" noGrp="1"/>
-          </p:cNvSpPr>
-          <p:nvPr/>
-        </p:nvSpPr>
-        <p:spPr>
-          <a:xfrm xmlns:a="http://schemas.openxmlformats.org/drawingml/2006/main">
-            <a:off x="6334125" y="3257550"/>
+                  <a:srgbClr val="263746"/>
+                </a:solidFill>
+                <a:latin typeface="Microsoft YaHei"/>
+                <a:ea typeface="Microsoft YaHei"/>
+                <a:cs typeface="Microsoft YaHei"/>
+              </a:rPr>
+              <a:t>证据地图：直接 / 补充 / 冲突 / 空白</a:t>
+            </a:r>
+          </a:p>
+        </p:txBody>
+      </p:sp>
+      <p:sp>
+        <p:nvSpPr>
+          <p:cNvPr id="14" name="p14-n4">
+            <a:extLst xmlns:a="http://schemas.openxmlformats.org/drawingml/2006/main">
+              <a:ext uri="{FF2B5EF4-FFF2-40B4-BE49-F238E27FC236}">
+                <a16:creationId xmlns:a16="http://schemas.microsoft.com/office/drawing/2014/main" id="{4B154F0A-F856-4064-A3DA-223FC5C552D9}"/>
+              </a:ext>
+            </a:extLst>
+          </p:cNvPr>
+          <p:cNvSpPr>
+            <a:spLocks xmlns:a="http://schemas.openxmlformats.org/drawingml/2006/main" noGrp="1"/>
+          </p:cNvSpPr>
+          <p:nvPr/>
+        </p:nvSpPr>
+        <p:spPr>
+          <a:xfrm xmlns:a="http://schemas.openxmlformats.org/drawingml/2006/main">
+            <a:off x="523875" y="3257550"/>
             <a:ext cx="438150" cy="438150"/>
           </a:xfrm>
           <a:prstGeom xmlns:a="http://schemas.openxmlformats.org/drawingml/2006/main" prst="roundRect">
@@ -8246,28 +8126,28 @@
                 <a:ea typeface="Microsoft YaHei"/>
                 <a:cs typeface="Microsoft YaHei"/>
               </a:rPr>
-              <a:t>6</a:t>
-            </a:r>
-          </a:p>
-        </p:txBody>
-      </p:sp>
-      <p:sp>
-        <p:nvSpPr>
-          <p:cNvPr id="17" name="p14-g5">
-            <a:extLst xmlns:a="http://schemas.openxmlformats.org/drawingml/2006/main">
-              <a:ext uri="{FF2B5EF4-FFF2-40B4-BE49-F238E27FC236}">
-                <a16:creationId xmlns:a16="http://schemas.microsoft.com/office/drawing/2014/main" id="{1A458401-F4A1-4728-84D7-956535F5B966}"/>
-              </a:ext>
-            </a:extLst>
-          </p:cNvPr>
-          <p:cNvSpPr>
-            <a:spLocks xmlns:a="http://schemas.openxmlformats.org/drawingml/2006/main" noGrp="1"/>
-          </p:cNvSpPr>
-          <p:nvPr/>
-        </p:nvSpPr>
-        <p:spPr>
-          <a:xfrm xmlns:a="http://schemas.openxmlformats.org/drawingml/2006/main">
-            <a:off x="6886575" y="3190875"/>
+              <a:t>5</a:t>
+            </a:r>
+          </a:p>
+        </p:txBody>
+      </p:sp>
+      <p:sp>
+        <p:nvSpPr>
+          <p:cNvPr id="15" name="p14-g4">
+            <a:extLst xmlns:a="http://schemas.openxmlformats.org/drawingml/2006/main">
+              <a:ext uri="{FF2B5EF4-FFF2-40B4-BE49-F238E27FC236}">
+                <a16:creationId xmlns:a16="http://schemas.microsoft.com/office/drawing/2014/main" id="{CB2FD493-51B5-4940-BFB6-251685B92D73}"/>
+              </a:ext>
+            </a:extLst>
+          </p:cNvPr>
+          <p:cNvSpPr>
+            <a:spLocks xmlns:a="http://schemas.openxmlformats.org/drawingml/2006/main" noGrp="1"/>
+          </p:cNvSpPr>
+          <p:nvPr/>
+        </p:nvSpPr>
+        <p:spPr>
+          <a:xfrm xmlns:a="http://schemas.openxmlformats.org/drawingml/2006/main">
+            <a:off x="1076325" y="3190875"/>
             <a:ext cx="5095875" cy="609600"/>
           </a:xfrm>
           <a:prstGeom xmlns:a="http://schemas.openxmlformats.org/drawingml/2006/main" prst="roundRect">
@@ -8309,28 +8189,28 @@
                 <a:ea typeface="Microsoft YaHei"/>
                 <a:cs typeface="Microsoft YaHei"/>
               </a:rPr>
-              <a:t>第一性原理：必要条件 / 关键约束 / 可检验前提</a:t>
-            </a:r>
-          </a:p>
-        </p:txBody>
-      </p:sp>
-      <p:sp>
-        <p:nvSpPr>
-          <p:cNvPr id="18" name="p14-n6">
-            <a:extLst xmlns:a="http://schemas.openxmlformats.org/drawingml/2006/main">
-              <a:ext uri="{FF2B5EF4-FFF2-40B4-BE49-F238E27FC236}">
-                <a16:creationId xmlns:a16="http://schemas.microsoft.com/office/drawing/2014/main" id="{C7A2082C-4BCE-4145-8BF2-80E4319AB6BD}"/>
-              </a:ext>
-            </a:extLst>
-          </p:cNvPr>
-          <p:cNvSpPr>
-            <a:spLocks xmlns:a="http://schemas.openxmlformats.org/drawingml/2006/main" noGrp="1"/>
-          </p:cNvSpPr>
-          <p:nvPr/>
-        </p:nvSpPr>
-        <p:spPr>
-          <a:xfrm xmlns:a="http://schemas.openxmlformats.org/drawingml/2006/main">
-            <a:off x="523875" y="4362450"/>
+              <a:t>问题含范围、非例、≥1 可证伪命题</a:t>
+            </a:r>
+          </a:p>
+        </p:txBody>
+      </p:sp>
+      <p:sp>
+        <p:nvSpPr>
+          <p:cNvPr id="16" name="p14-n5">
+            <a:extLst xmlns:a="http://schemas.openxmlformats.org/drawingml/2006/main">
+              <a:ext uri="{FF2B5EF4-FFF2-40B4-BE49-F238E27FC236}">
+                <a16:creationId xmlns:a16="http://schemas.microsoft.com/office/drawing/2014/main" id="{C1D4EBF9-128B-4445-96B7-209AF0D29820}"/>
+              </a:ext>
+            </a:extLst>
+          </p:cNvPr>
+          <p:cNvSpPr>
+            <a:spLocks xmlns:a="http://schemas.openxmlformats.org/drawingml/2006/main" noGrp="1"/>
+          </p:cNvSpPr>
+          <p:nvPr/>
+        </p:nvSpPr>
+        <p:spPr>
+          <a:xfrm xmlns:a="http://schemas.openxmlformats.org/drawingml/2006/main">
+            <a:off x="6334125" y="3257550"/>
             <a:ext cx="438150" cy="438150"/>
           </a:xfrm>
           <a:prstGeom xmlns:a="http://schemas.openxmlformats.org/drawingml/2006/main" prst="roundRect">
@@ -8366,28 +8246,28 @@
                 <a:ea typeface="Microsoft YaHei"/>
                 <a:cs typeface="Microsoft YaHei"/>
               </a:rPr>
-              <a:t>7</a:t>
-            </a:r>
-          </a:p>
-        </p:txBody>
-      </p:sp>
-      <p:sp>
-        <p:nvSpPr>
-          <p:cNvPr id="19" name="p14-g6">
-            <a:extLst xmlns:a="http://schemas.openxmlformats.org/drawingml/2006/main">
-              <a:ext uri="{FF2B5EF4-FFF2-40B4-BE49-F238E27FC236}">
-                <a16:creationId xmlns:a16="http://schemas.microsoft.com/office/drawing/2014/main" id="{A903378D-4EE8-4063-A7FC-AEB17EF7FCAF}"/>
-              </a:ext>
-            </a:extLst>
-          </p:cNvPr>
-          <p:cNvSpPr>
-            <a:spLocks xmlns:a="http://schemas.openxmlformats.org/drawingml/2006/main" noGrp="1"/>
-          </p:cNvSpPr>
-          <p:nvPr/>
-        </p:nvSpPr>
-        <p:spPr>
-          <a:xfrm xmlns:a="http://schemas.openxmlformats.org/drawingml/2006/main">
-            <a:off x="1076325" y="4295775"/>
+              <a:t>6</a:t>
+            </a:r>
+          </a:p>
+        </p:txBody>
+      </p:sp>
+      <p:sp>
+        <p:nvSpPr>
+          <p:cNvPr id="17" name="p14-g5">
+            <a:extLst xmlns:a="http://schemas.openxmlformats.org/drawingml/2006/main">
+              <a:ext uri="{FF2B5EF4-FFF2-40B4-BE49-F238E27FC236}">
+                <a16:creationId xmlns:a16="http://schemas.microsoft.com/office/drawing/2014/main" id="{9199512B-285B-43A4-BCB8-35CB2F537226}"/>
+              </a:ext>
+            </a:extLst>
+          </p:cNvPr>
+          <p:cNvSpPr>
+            <a:spLocks xmlns:a="http://schemas.openxmlformats.org/drawingml/2006/main" noGrp="1"/>
+          </p:cNvSpPr>
+          <p:nvPr/>
+        </p:nvSpPr>
+        <p:spPr>
+          <a:xfrm xmlns:a="http://schemas.openxmlformats.org/drawingml/2006/main">
+            <a:off x="6886575" y="3190875"/>
             <a:ext cx="5095875" cy="609600"/>
           </a:xfrm>
           <a:prstGeom xmlns:a="http://schemas.openxmlformats.org/drawingml/2006/main" prst="roundRect">
@@ -8429,28 +8309,28 @@
                 <a:ea typeface="Microsoft YaHei"/>
                 <a:cs typeface="Microsoft YaHei"/>
               </a:rPr>
-              <a:t>重要性 + 课程周期可行性</a:t>
-            </a:r>
-          </a:p>
-        </p:txBody>
-      </p:sp>
-      <p:sp>
-        <p:nvSpPr>
-          <p:cNvPr id="20" name="p14-n7">
-            <a:extLst xmlns:a="http://schemas.openxmlformats.org/drawingml/2006/main">
-              <a:ext uri="{FF2B5EF4-FFF2-40B4-BE49-F238E27FC236}">
-                <a16:creationId xmlns:a16="http://schemas.microsoft.com/office/drawing/2014/main" id="{4FACE0BD-C123-4985-BDD4-6942226A9515}"/>
-              </a:ext>
-            </a:extLst>
-          </p:cNvPr>
-          <p:cNvSpPr>
-            <a:spLocks xmlns:a="http://schemas.openxmlformats.org/drawingml/2006/main" noGrp="1"/>
-          </p:cNvSpPr>
-          <p:nvPr/>
-        </p:nvSpPr>
-        <p:spPr>
-          <a:xfrm xmlns:a="http://schemas.openxmlformats.org/drawingml/2006/main">
-            <a:off x="6334125" y="4362450"/>
+              <a:t>第一性原理：必要条件 / 关键约束 / 可检验前提</a:t>
+            </a:r>
+          </a:p>
+        </p:txBody>
+      </p:sp>
+      <p:sp>
+        <p:nvSpPr>
+          <p:cNvPr id="18" name="p14-n6">
+            <a:extLst xmlns:a="http://schemas.openxmlformats.org/drawingml/2006/main">
+              <a:ext uri="{FF2B5EF4-FFF2-40B4-BE49-F238E27FC236}">
+                <a16:creationId xmlns:a16="http://schemas.microsoft.com/office/drawing/2014/main" id="{23645BE0-F710-44EF-AB07-20611DDD6A6B}"/>
+              </a:ext>
+            </a:extLst>
+          </p:cNvPr>
+          <p:cNvSpPr>
+            <a:spLocks xmlns:a="http://schemas.openxmlformats.org/drawingml/2006/main" noGrp="1"/>
+          </p:cNvSpPr>
+          <p:nvPr/>
+        </p:nvSpPr>
+        <p:spPr>
+          <a:xfrm xmlns:a="http://schemas.openxmlformats.org/drawingml/2006/main">
+            <a:off x="523875" y="4362450"/>
             <a:ext cx="438150" cy="438150"/>
           </a:xfrm>
           <a:prstGeom xmlns:a="http://schemas.openxmlformats.org/drawingml/2006/main" prst="roundRect">
@@ -8459,7 +8339,7 @@
             </a:avLst>
           </a:prstGeom>
           <a:solidFill xmlns:a="http://schemas.openxmlformats.org/drawingml/2006/main">
-            <a:srgbClr val="18354E"/>
+            <a:srgbClr val="C8161E"/>
           </a:solidFill>
           <a:ln xmlns:a="http://schemas.openxmlformats.org/drawingml/2006/main" w="0">
             <a:noFill/>
@@ -8486,28 +8366,28 @@
                 <a:ea typeface="Microsoft YaHei"/>
                 <a:cs typeface="Microsoft YaHei"/>
               </a:rPr>
-              <a:t>8</a:t>
-            </a:r>
-          </a:p>
-        </p:txBody>
-      </p:sp>
-      <p:sp>
-        <p:nvSpPr>
-          <p:cNvPr id="21" name="p14-g7">
-            <a:extLst xmlns:a="http://schemas.openxmlformats.org/drawingml/2006/main">
-              <a:ext uri="{FF2B5EF4-FFF2-40B4-BE49-F238E27FC236}">
-                <a16:creationId xmlns:a16="http://schemas.microsoft.com/office/drawing/2014/main" id="{164AFC81-3870-4711-B704-B1DE9B59F23E}"/>
-              </a:ext>
-            </a:extLst>
-          </p:cNvPr>
-          <p:cNvSpPr>
-            <a:spLocks xmlns:a="http://schemas.openxmlformats.org/drawingml/2006/main" noGrp="1"/>
-          </p:cNvSpPr>
-          <p:nvPr/>
-        </p:nvSpPr>
-        <p:spPr>
-          <a:xfrm xmlns:a="http://schemas.openxmlformats.org/drawingml/2006/main">
-            <a:off x="6886575" y="4295775"/>
+              <a:t>7</a:t>
+            </a:r>
+          </a:p>
+        </p:txBody>
+      </p:sp>
+      <p:sp>
+        <p:nvSpPr>
+          <p:cNvPr id="19" name="p14-g6">
+            <a:extLst xmlns:a="http://schemas.openxmlformats.org/drawingml/2006/main">
+              <a:ext uri="{FF2B5EF4-FFF2-40B4-BE49-F238E27FC236}">
+                <a16:creationId xmlns:a16="http://schemas.microsoft.com/office/drawing/2014/main" id="{52D6D6FE-A9D0-43AD-96ED-22B1C9178E23}"/>
+              </a:ext>
+            </a:extLst>
+          </p:cNvPr>
+          <p:cNvSpPr>
+            <a:spLocks xmlns:a="http://schemas.openxmlformats.org/drawingml/2006/main" noGrp="1"/>
+          </p:cNvSpPr>
+          <p:nvPr/>
+        </p:nvSpPr>
+        <p:spPr>
+          <a:xfrm xmlns:a="http://schemas.openxmlformats.org/drawingml/2006/main">
+            <a:off x="1076325" y="4295775"/>
             <a:ext cx="5095875" cy="609600"/>
           </a:xfrm>
           <a:prstGeom xmlns:a="http://schemas.openxmlformats.org/drawingml/2006/main" prst="roundRect">
@@ -8516,7 +8396,7 @@
             </a:avLst>
           </a:prstGeom>
           <a:solidFill xmlns:a="http://schemas.openxmlformats.org/drawingml/2006/main">
-            <a:srgbClr val="F3F6F7"/>
+            <a:srgbClr val="F8E9EA"/>
           </a:solidFill>
           <a:ln xmlns:a="http://schemas.openxmlformats.org/drawingml/2006/main" w="9525">
             <a:solidFill>
@@ -8536,6 +8416,126 @@
               <a:buNone/>
               <a:defRPr sz="1350" b="1">
                 <a:solidFill>
+                  <a:srgbClr val="C8161E"/>
+                </a:solidFill>
+              </a:defRPr>
+            </a:pPr>
+            <a:r>
+              <a:rPr sz="1350" b="1">
+                <a:solidFill>
+                  <a:srgbClr val="C8161E"/>
+                </a:solidFill>
+                <a:latin typeface="Microsoft YaHei"/>
+                <a:ea typeface="Microsoft YaHei"/>
+                <a:cs typeface="Microsoft YaHei"/>
+              </a:rPr>
+              <a:t>重要性 + 课程周期可行性</a:t>
+            </a:r>
+          </a:p>
+        </p:txBody>
+      </p:sp>
+      <p:sp>
+        <p:nvSpPr>
+          <p:cNvPr id="20" name="p14-n7">
+            <a:extLst xmlns:a="http://schemas.openxmlformats.org/drawingml/2006/main">
+              <a:ext uri="{FF2B5EF4-FFF2-40B4-BE49-F238E27FC236}">
+                <a16:creationId xmlns:a16="http://schemas.microsoft.com/office/drawing/2014/main" id="{55EB9F84-8D40-4ED0-AE82-7550726D6EEB}"/>
+              </a:ext>
+            </a:extLst>
+          </p:cNvPr>
+          <p:cNvSpPr>
+            <a:spLocks xmlns:a="http://schemas.openxmlformats.org/drawingml/2006/main" noGrp="1"/>
+          </p:cNvSpPr>
+          <p:nvPr/>
+        </p:nvSpPr>
+        <p:spPr>
+          <a:xfrm xmlns:a="http://schemas.openxmlformats.org/drawingml/2006/main">
+            <a:off x="6334125" y="4362450"/>
+            <a:ext cx="438150" cy="438150"/>
+          </a:xfrm>
+          <a:prstGeom xmlns:a="http://schemas.openxmlformats.org/drawingml/2006/main" prst="roundRect">
+            <a:avLst>
+              <a:gd name="adj" fmla="val 17391"/>
+            </a:avLst>
+          </a:prstGeom>
+          <a:solidFill xmlns:a="http://schemas.openxmlformats.org/drawingml/2006/main">
+            <a:srgbClr val="18354E"/>
+          </a:solidFill>
+          <a:ln xmlns:a="http://schemas.openxmlformats.org/drawingml/2006/main" w="0">
+            <a:noFill/>
+            <a:prstDash val="solid"/>
+          </a:ln>
+        </p:spPr>
+        <p:txBody>
+          <a:bodyPr xmlns:a="http://schemas.openxmlformats.org/drawingml/2006/main" lIns="76200" tIns="38100" rIns="76200" bIns="38100" anchor="ctr"/>
+          <a:lstStyle xmlns:a="http://schemas.openxmlformats.org/drawingml/2006/main"/>
+          <a:p xmlns:a="http://schemas.openxmlformats.org/drawingml/2006/main">
+            <a:pPr algn="ctr">
+              <a:defRPr sz="1350" b="1">
+                <a:solidFill>
+                  <a:srgbClr val="FFFFFF"/>
+                </a:solidFill>
+              </a:defRPr>
+            </a:pPr>
+            <a:r>
+              <a:rPr sz="1350" b="1">
+                <a:solidFill>
+                  <a:srgbClr val="FFFFFF"/>
+                </a:solidFill>
+                <a:latin typeface="Microsoft YaHei"/>
+                <a:ea typeface="Microsoft YaHei"/>
+                <a:cs typeface="Microsoft YaHei"/>
+              </a:rPr>
+              <a:t>8</a:t>
+            </a:r>
+          </a:p>
+        </p:txBody>
+      </p:sp>
+      <p:sp>
+        <p:nvSpPr>
+          <p:cNvPr id="21" name="p14-g7">
+            <a:extLst xmlns:a="http://schemas.openxmlformats.org/drawingml/2006/main">
+              <a:ext uri="{FF2B5EF4-FFF2-40B4-BE49-F238E27FC236}">
+                <a16:creationId xmlns:a16="http://schemas.microsoft.com/office/drawing/2014/main" id="{9B9CB43C-F9A2-479A-97C5-6A968F310811}"/>
+              </a:ext>
+            </a:extLst>
+          </p:cNvPr>
+          <p:cNvSpPr>
+            <a:spLocks xmlns:a="http://schemas.openxmlformats.org/drawingml/2006/main" noGrp="1"/>
+          </p:cNvSpPr>
+          <p:nvPr/>
+        </p:nvSpPr>
+        <p:spPr>
+          <a:xfrm xmlns:a="http://schemas.openxmlformats.org/drawingml/2006/main">
+            <a:off x="6886575" y="4295775"/>
+            <a:ext cx="5095875" cy="609600"/>
+          </a:xfrm>
+          <a:prstGeom xmlns:a="http://schemas.openxmlformats.org/drawingml/2006/main" prst="roundRect">
+            <a:avLst>
+              <a:gd name="adj" fmla="val 12500"/>
+            </a:avLst>
+          </a:prstGeom>
+          <a:solidFill xmlns:a="http://schemas.openxmlformats.org/drawingml/2006/main">
+            <a:srgbClr val="F3F6F7"/>
+          </a:solidFill>
+          <a:ln xmlns:a="http://schemas.openxmlformats.org/drawingml/2006/main" w="9525">
+            <a:solidFill>
+              <a:srgbClr val="D6DDE2"/>
+            </a:solidFill>
+            <a:prstDash val="solid"/>
+          </a:ln>
+        </p:spPr>
+        <p:txBody>
+          <a:bodyPr xmlns:a="http://schemas.openxmlformats.org/drawingml/2006/main" lIns="76200" tIns="38100" rIns="76200" bIns="38100" anchor="ctr"/>
+          <a:lstStyle xmlns:a="http://schemas.openxmlformats.org/drawingml/2006/main"/>
+          <a:p xmlns:a="http://schemas.openxmlformats.org/drawingml/2006/main">
+            <a:pPr algn="ctr">
+              <a:lnSpc>
+                <a:spcPct val="102000"/>
+              </a:lnSpc>
+              <a:buNone/>
+              <a:defRPr sz="1350" b="1">
+                <a:solidFill>
                   <a:srgbClr val="263746"/>
                 </a:solidFill>
               </a:defRPr>
@@ -8559,7 +8559,7 @@
           <p:cNvPr id="22" name="p14-bottom">
             <a:extLst xmlns:a="http://schemas.openxmlformats.org/drawingml/2006/main">
               <a:ext uri="{FF2B5EF4-FFF2-40B4-BE49-F238E27FC236}">
-                <a16:creationId xmlns:a16="http://schemas.microsoft.com/office/drawing/2014/main" id="{CBD30F10-E147-4429-B062-BA7C59342D07}"/>
+                <a16:creationId xmlns:a16="http://schemas.microsoft.com/office/drawing/2014/main" id="{DD4BB5BE-0FA3-45ED-9656-CA057F2348A4}"/>
               </a:ext>
             </a:extLst>
           </p:cNvPr>
@@ -8704,7 +8704,7 @@
           <p:cNvPr id="6" name="p15-virtual">
             <a:extLst xmlns:a="http://schemas.openxmlformats.org/drawingml/2006/main">
               <a:ext uri="{FF2B5EF4-FFF2-40B4-BE49-F238E27FC236}">
-                <a16:creationId xmlns:a16="http://schemas.microsoft.com/office/drawing/2014/main" id="{058FDC36-A2DD-4DAC-BA5D-463E0E4C3046}"/>
+                <a16:creationId xmlns:a16="http://schemas.microsoft.com/office/drawing/2014/main" id="{A576835C-585A-4533-B59E-D9FA3DACAC7D}"/>
               </a:ext>
             </a:extLst>
           </p:cNvPr>
@@ -8761,7 +8761,7 @@
           <p:cNvPr id="7" name="p15-h0">
             <a:extLst xmlns:a="http://schemas.openxmlformats.org/drawingml/2006/main">
               <a:ext uri="{FF2B5EF4-FFF2-40B4-BE49-F238E27FC236}">
-                <a16:creationId xmlns:a16="http://schemas.microsoft.com/office/drawing/2014/main" id="{E094CC0A-BB15-42C1-972B-C3213EDC899C}"/>
+                <a16:creationId xmlns:a16="http://schemas.microsoft.com/office/drawing/2014/main" id="{730DC981-8DDD-4F79-9DDE-553B3E74E908}"/>
               </a:ext>
             </a:extLst>
           </p:cNvPr>
@@ -8816,7 +8816,7 @@
           <p:cNvPr id="8" name="p15-h1">
             <a:extLst xmlns:a="http://schemas.openxmlformats.org/drawingml/2006/main">
               <a:ext uri="{FF2B5EF4-FFF2-40B4-BE49-F238E27FC236}">
-                <a16:creationId xmlns:a16="http://schemas.microsoft.com/office/drawing/2014/main" id="{6E2565C9-7631-4B2B-9179-9DCAAE789735}"/>
+                <a16:creationId xmlns:a16="http://schemas.microsoft.com/office/drawing/2014/main" id="{2AB6B045-332B-4496-BE55-88E2FA801C55}"/>
               </a:ext>
             </a:extLst>
           </p:cNvPr>
@@ -8871,7 +8871,7 @@
           <p:cNvPr id="9" name="p15-h2">
             <a:extLst xmlns:a="http://schemas.openxmlformats.org/drawingml/2006/main">
               <a:ext uri="{FF2B5EF4-FFF2-40B4-BE49-F238E27FC236}">
-                <a16:creationId xmlns:a16="http://schemas.microsoft.com/office/drawing/2014/main" id="{0E450186-5D0C-4E1E-A138-46283BCF28D5}"/>
+                <a16:creationId xmlns:a16="http://schemas.microsoft.com/office/drawing/2014/main" id="{AAD4E3D3-714F-473F-BE90-65FC1FEF70F1}"/>
               </a:ext>
             </a:extLst>
           </p:cNvPr>
@@ -8926,7 +8926,7 @@
           <p:cNvPr id="10" name="p15-r0-0">
             <a:extLst xmlns:a="http://schemas.openxmlformats.org/drawingml/2006/main">
               <a:ext uri="{FF2B5EF4-FFF2-40B4-BE49-F238E27FC236}">
-                <a16:creationId xmlns:a16="http://schemas.microsoft.com/office/drawing/2014/main" id="{79D4979C-9915-42E8-9AE1-CC40E0F939A8}"/>
+                <a16:creationId xmlns:a16="http://schemas.microsoft.com/office/drawing/2014/main" id="{C0A1287A-386F-4E5F-9921-5E22FA955CF7}"/>
               </a:ext>
             </a:extLst>
           </p:cNvPr>
@@ -8987,7 +8987,7 @@
           <p:cNvPr id="11" name="p15-r0-1">
             <a:extLst xmlns:a="http://schemas.openxmlformats.org/drawingml/2006/main">
               <a:ext uri="{FF2B5EF4-FFF2-40B4-BE49-F238E27FC236}">
-                <a16:creationId xmlns:a16="http://schemas.microsoft.com/office/drawing/2014/main" id="{323D1894-42EA-4454-A090-EDCF8445C0D0}"/>
+                <a16:creationId xmlns:a16="http://schemas.microsoft.com/office/drawing/2014/main" id="{C8F873BE-4FAD-478A-988D-2BCABADA7843}"/>
               </a:ext>
             </a:extLst>
           </p:cNvPr>
@@ -9048,7 +9048,7 @@
           <p:cNvPr id="12" name="p15-r0-2">
             <a:extLst xmlns:a="http://schemas.openxmlformats.org/drawingml/2006/main">
               <a:ext uri="{FF2B5EF4-FFF2-40B4-BE49-F238E27FC236}">
-                <a16:creationId xmlns:a16="http://schemas.microsoft.com/office/drawing/2014/main" id="{6CDCA543-F3B1-4A9C-8AFC-293BD7361C4A}"/>
+                <a16:creationId xmlns:a16="http://schemas.microsoft.com/office/drawing/2014/main" id="{F38B84D9-2AD4-4CF4-8C16-1E8A2BBF2D60}"/>
               </a:ext>
             </a:extLst>
           </p:cNvPr>
@@ -9109,7 +9109,7 @@
           <p:cNvPr id="13" name="p15-r1-0">
             <a:extLst xmlns:a="http://schemas.openxmlformats.org/drawingml/2006/main">
               <a:ext uri="{FF2B5EF4-FFF2-40B4-BE49-F238E27FC236}">
-                <a16:creationId xmlns:a16="http://schemas.microsoft.com/office/drawing/2014/main" id="{7642CEC9-F0CA-4357-8222-35AD59DDCC5D}"/>
+                <a16:creationId xmlns:a16="http://schemas.microsoft.com/office/drawing/2014/main" id="{ACD499F4-E6D9-4D94-852E-988576D63E87}"/>
               </a:ext>
             </a:extLst>
           </p:cNvPr>
@@ -9170,7 +9170,7 @@
           <p:cNvPr id="14" name="p15-r1-1">
             <a:extLst xmlns:a="http://schemas.openxmlformats.org/drawingml/2006/main">
               <a:ext uri="{FF2B5EF4-FFF2-40B4-BE49-F238E27FC236}">
-                <a16:creationId xmlns:a16="http://schemas.microsoft.com/office/drawing/2014/main" id="{AF8A7F5A-B369-4A80-9E30-04CC3DC1A23E}"/>
+                <a16:creationId xmlns:a16="http://schemas.microsoft.com/office/drawing/2014/main" id="{728F947E-437D-4432-8856-585D26A67C5E}"/>
               </a:ext>
             </a:extLst>
           </p:cNvPr>
@@ -9231,7 +9231,7 @@
           <p:cNvPr id="15" name="p15-r1-2">
             <a:extLst xmlns:a="http://schemas.openxmlformats.org/drawingml/2006/main">
               <a:ext uri="{FF2B5EF4-FFF2-40B4-BE49-F238E27FC236}">
-                <a16:creationId xmlns:a16="http://schemas.microsoft.com/office/drawing/2014/main" id="{68DB1285-C769-48F4-B80D-29E887DEB880}"/>
+                <a16:creationId xmlns:a16="http://schemas.microsoft.com/office/drawing/2014/main" id="{737F0341-6E94-49A1-A7C8-3BBE2886BB8E}"/>
               </a:ext>
             </a:extLst>
           </p:cNvPr>
@@ -9292,7 +9292,7 @@
           <p:cNvPr id="16" name="p15-r2-0">
             <a:extLst xmlns:a="http://schemas.openxmlformats.org/drawingml/2006/main">
               <a:ext uri="{FF2B5EF4-FFF2-40B4-BE49-F238E27FC236}">
-                <a16:creationId xmlns:a16="http://schemas.microsoft.com/office/drawing/2014/main" id="{77E07465-B133-4D0B-ACFC-B75F7755AA69}"/>
+                <a16:creationId xmlns:a16="http://schemas.microsoft.com/office/drawing/2014/main" id="{0C20E31C-C512-44CB-A135-7A43E1CB64DB}"/>
               </a:ext>
             </a:extLst>
           </p:cNvPr>
@@ -9353,7 +9353,7 @@
           <p:cNvPr id="17" name="p15-r2-1">
             <a:extLst xmlns:a="http://schemas.openxmlformats.org/drawingml/2006/main">
               <a:ext uri="{FF2B5EF4-FFF2-40B4-BE49-F238E27FC236}">
-                <a16:creationId xmlns:a16="http://schemas.microsoft.com/office/drawing/2014/main" id="{C1C3AD4B-0FE0-444A-9DFC-A8D2E8D7CE1F}"/>
+                <a16:creationId xmlns:a16="http://schemas.microsoft.com/office/drawing/2014/main" id="{3D89147B-6989-449E-9381-66EF83DE7F38}"/>
               </a:ext>
             </a:extLst>
           </p:cNvPr>
@@ -9414,7 +9414,7 @@
           <p:cNvPr id="18" name="p15-r2-2">
             <a:extLst xmlns:a="http://schemas.openxmlformats.org/drawingml/2006/main">
               <a:ext uri="{FF2B5EF4-FFF2-40B4-BE49-F238E27FC236}">
-                <a16:creationId xmlns:a16="http://schemas.microsoft.com/office/drawing/2014/main" id="{6356D719-3058-4023-B796-4DDA9EAF4A4E}"/>
+                <a16:creationId xmlns:a16="http://schemas.microsoft.com/office/drawing/2014/main" id="{9F1D0FA1-2385-41A4-BBC9-6D7C266C0217}"/>
               </a:ext>
             </a:extLst>
           </p:cNvPr>
@@ -9475,7 +9475,7 @@
           <p:cNvPr id="19" name="p15-r3-0">
             <a:extLst xmlns:a="http://schemas.openxmlformats.org/drawingml/2006/main">
               <a:ext uri="{FF2B5EF4-FFF2-40B4-BE49-F238E27FC236}">
-                <a16:creationId xmlns:a16="http://schemas.microsoft.com/office/drawing/2014/main" id="{A6AAC1AF-3289-4948-B6B6-572314CE1D21}"/>
+                <a16:creationId xmlns:a16="http://schemas.microsoft.com/office/drawing/2014/main" id="{E183C524-7689-49FE-9F52-65FB368D363B}"/>
               </a:ext>
             </a:extLst>
           </p:cNvPr>
@@ -9536,7 +9536,7 @@
           <p:cNvPr id="20" name="p15-r3-1">
             <a:extLst xmlns:a="http://schemas.openxmlformats.org/drawingml/2006/main">
               <a:ext uri="{FF2B5EF4-FFF2-40B4-BE49-F238E27FC236}">
-                <a16:creationId xmlns:a16="http://schemas.microsoft.com/office/drawing/2014/main" id="{7D135A67-C966-476E-BC13-9A581EB32DC1}"/>
+                <a16:creationId xmlns:a16="http://schemas.microsoft.com/office/drawing/2014/main" id="{A68A5056-F6AF-4374-9133-9D969034C68C}"/>
               </a:ext>
             </a:extLst>
           </p:cNvPr>
@@ -9597,7 +9597,7 @@
           <p:cNvPr id="21" name="p15-r3-2">
             <a:extLst xmlns:a="http://schemas.openxmlformats.org/drawingml/2006/main">
               <a:ext uri="{FF2B5EF4-FFF2-40B4-BE49-F238E27FC236}">
-                <a16:creationId xmlns:a16="http://schemas.microsoft.com/office/drawing/2014/main" id="{50A15DA3-71C3-4307-AB2A-A15C34FCC610}"/>
+                <a16:creationId xmlns:a16="http://schemas.microsoft.com/office/drawing/2014/main" id="{414F4EE9-C344-4EC3-8299-D385C963F7EA}"/>
               </a:ext>
             </a:extLst>
           </p:cNvPr>
@@ -9658,7 +9658,7 @@
           <p:cNvPr id="22" name="p15-now0">
             <a:extLst xmlns:a="http://schemas.openxmlformats.org/drawingml/2006/main">
               <a:ext uri="{FF2B5EF4-FFF2-40B4-BE49-F238E27FC236}">
-                <a16:creationId xmlns:a16="http://schemas.microsoft.com/office/drawing/2014/main" id="{ED7F15A7-0D12-41B6-B657-C904A34E23FB}"/>
+                <a16:creationId xmlns:a16="http://schemas.microsoft.com/office/drawing/2014/main" id="{588FBE6B-436C-403B-8298-A116F0CEAE6C}"/>
               </a:ext>
             </a:extLst>
           </p:cNvPr>
@@ -9717,7 +9717,7 @@
           <p:cNvPr id="23" name="p15-now1">
             <a:extLst xmlns:a="http://schemas.openxmlformats.org/drawingml/2006/main">
               <a:ext uri="{FF2B5EF4-FFF2-40B4-BE49-F238E27FC236}">
-                <a16:creationId xmlns:a16="http://schemas.microsoft.com/office/drawing/2014/main" id="{E3FB080C-F740-4EA8-AEA1-8DD748008517}"/>
+                <a16:creationId xmlns:a16="http://schemas.microsoft.com/office/drawing/2014/main" id="{1E2F6875-F762-48CA-9CB9-6095EB3FDC31}"/>
               </a:ext>
             </a:extLst>
           </p:cNvPr>
@@ -9776,7 +9776,7 @@
           <p:cNvPr id="24" name="p15-now2">
             <a:extLst xmlns:a="http://schemas.openxmlformats.org/drawingml/2006/main">
               <a:ext uri="{FF2B5EF4-FFF2-40B4-BE49-F238E27FC236}">
-                <a16:creationId xmlns:a16="http://schemas.microsoft.com/office/drawing/2014/main" id="{870CBCFF-9661-4C29-BDE8-56125387F2A5}"/>
+                <a16:creationId xmlns:a16="http://schemas.microsoft.com/office/drawing/2014/main" id="{B8E8C07A-A583-4899-8C7F-194A0A2D9BCE}"/>
               </a:ext>
             </a:extLst>
           </p:cNvPr>
@@ -9835,7 +9835,7 @@
           <p:cNvPr id="25" name="p15-now3">
             <a:extLst xmlns:a="http://schemas.openxmlformats.org/drawingml/2006/main">
               <a:ext uri="{FF2B5EF4-FFF2-40B4-BE49-F238E27FC236}">
-                <a16:creationId xmlns:a16="http://schemas.microsoft.com/office/drawing/2014/main" id="{FEFF92BB-7BF7-4531-8E3F-18D55C1F1F9D}"/>
+                <a16:creationId xmlns:a16="http://schemas.microsoft.com/office/drawing/2014/main" id="{20CAC8EA-EC14-4807-A417-56C18565F204}"/>
               </a:ext>
             </a:extLst>
           </p:cNvPr>
@@ -9894,7 +9894,7 @@
           <p:cNvPr id="26" name="p15-bottom">
             <a:extLst xmlns:a="http://schemas.openxmlformats.org/drawingml/2006/main">
               <a:ext uri="{FF2B5EF4-FFF2-40B4-BE49-F238E27FC236}">
-                <a16:creationId xmlns:a16="http://schemas.microsoft.com/office/drawing/2014/main" id="{806FC076-20EA-496E-BD45-076EC4085DA7}"/>
+                <a16:creationId xmlns:a16="http://schemas.microsoft.com/office/drawing/2014/main" id="{E2E0BF48-900B-4294-BE7F-A80F816F1E0E}"/>
               </a:ext>
             </a:extLst>
           </p:cNvPr>
@@ -10039,7 +10039,7 @@
           <p:cNvPr id="6" name="p16-n0">
             <a:extLst xmlns:a="http://schemas.openxmlformats.org/drawingml/2006/main">
               <a:ext uri="{FF2B5EF4-FFF2-40B4-BE49-F238E27FC236}">
-                <a16:creationId xmlns:a16="http://schemas.microsoft.com/office/drawing/2014/main" id="{D558472B-9A99-4527-96CF-463E57E007B1}"/>
+                <a16:creationId xmlns:a16="http://schemas.microsoft.com/office/drawing/2014/main" id="{91DBC234-FE99-4D41-A004-C6A3759D3D71}"/>
               </a:ext>
             </a:extLst>
           </p:cNvPr>
@@ -10096,7 +10096,7 @@
           <p:cNvPr id="7" name="p16-t0">
             <a:extLst xmlns:a="http://schemas.openxmlformats.org/drawingml/2006/main">
               <a:ext uri="{FF2B5EF4-FFF2-40B4-BE49-F238E27FC236}">
-                <a16:creationId xmlns:a16="http://schemas.microsoft.com/office/drawing/2014/main" id="{00B6434C-E692-4FBD-9251-D54AC5EA20A6}"/>
+                <a16:creationId xmlns:a16="http://schemas.microsoft.com/office/drawing/2014/main" id="{D879BF3A-DD12-4177-B572-1AD9816D1EEB}"/>
               </a:ext>
             </a:extLst>
           </p:cNvPr>
@@ -10155,7 +10155,7 @@
           <p:cNvPr id="8" name="p16-n1">
             <a:extLst xmlns:a="http://schemas.openxmlformats.org/drawingml/2006/main">
               <a:ext uri="{FF2B5EF4-FFF2-40B4-BE49-F238E27FC236}">
-                <a16:creationId xmlns:a16="http://schemas.microsoft.com/office/drawing/2014/main" id="{D34BBBF2-3909-4640-BCA6-D7C2227FD2F8}"/>
+                <a16:creationId xmlns:a16="http://schemas.microsoft.com/office/drawing/2014/main" id="{4C890D0B-9AB3-4911-97D7-C67EA63F8C42}"/>
               </a:ext>
             </a:extLst>
           </p:cNvPr>
@@ -10212,7 +10212,7 @@
           <p:cNvPr id="9" name="p16-t1">
             <a:extLst xmlns:a="http://schemas.openxmlformats.org/drawingml/2006/main">
               <a:ext uri="{FF2B5EF4-FFF2-40B4-BE49-F238E27FC236}">
-                <a16:creationId xmlns:a16="http://schemas.microsoft.com/office/drawing/2014/main" id="{590859A4-9E2D-4DFD-9C84-A1141727F320}"/>
+                <a16:creationId xmlns:a16="http://schemas.microsoft.com/office/drawing/2014/main" id="{1F9E1C3B-6608-48C4-A40D-9F8868D9C529}"/>
               </a:ext>
             </a:extLst>
           </p:cNvPr>
@@ -10271,7 +10271,7 @@
           <p:cNvPr id="10" name="p16-n2">
             <a:extLst xmlns:a="http://schemas.openxmlformats.org/drawingml/2006/main">
               <a:ext uri="{FF2B5EF4-FFF2-40B4-BE49-F238E27FC236}">
-                <a16:creationId xmlns:a16="http://schemas.microsoft.com/office/drawing/2014/main" id="{D034D805-4DEE-4200-99FC-5A3AD647A20D}"/>
+                <a16:creationId xmlns:a16="http://schemas.microsoft.com/office/drawing/2014/main" id="{3F6E66AB-8336-48A7-A1AC-FFF871F3D3EA}"/>
               </a:ext>
             </a:extLst>
           </p:cNvPr>
@@ -10328,7 +10328,7 @@
           <p:cNvPr id="11" name="p16-t2">
             <a:extLst xmlns:a="http://schemas.openxmlformats.org/drawingml/2006/main">
               <a:ext uri="{FF2B5EF4-FFF2-40B4-BE49-F238E27FC236}">
-                <a16:creationId xmlns:a16="http://schemas.microsoft.com/office/drawing/2014/main" id="{916AFCC8-B775-437D-8FD6-4358D58BE4A2}"/>
+                <a16:creationId xmlns:a16="http://schemas.microsoft.com/office/drawing/2014/main" id="{C852C743-612A-44F9-AFE9-80EE15D41050}"/>
               </a:ext>
             </a:extLst>
           </p:cNvPr>
@@ -10387,7 +10387,7 @@
           <p:cNvPr id="12" name="p16-n3">
             <a:extLst xmlns:a="http://schemas.openxmlformats.org/drawingml/2006/main">
               <a:ext uri="{FF2B5EF4-FFF2-40B4-BE49-F238E27FC236}">
-                <a16:creationId xmlns:a16="http://schemas.microsoft.com/office/drawing/2014/main" id="{FC56DDCF-9C6E-45F5-8606-0B50AD753EDE}"/>
+                <a16:creationId xmlns:a16="http://schemas.microsoft.com/office/drawing/2014/main" id="{866EA4BB-1C8A-42ED-9B00-7E4595B4174D}"/>
               </a:ext>
             </a:extLst>
           </p:cNvPr>
@@ -10444,7 +10444,7 @@
           <p:cNvPr id="13" name="p16-t3">
             <a:extLst xmlns:a="http://schemas.openxmlformats.org/drawingml/2006/main">
               <a:ext uri="{FF2B5EF4-FFF2-40B4-BE49-F238E27FC236}">
-                <a16:creationId xmlns:a16="http://schemas.microsoft.com/office/drawing/2014/main" id="{5930A964-2E50-4248-A74F-9E018E461F17}"/>
+                <a16:creationId xmlns:a16="http://schemas.microsoft.com/office/drawing/2014/main" id="{15293B82-7263-4DF6-9D07-24A096F42C8B}"/>
               </a:ext>
             </a:extLst>
           </p:cNvPr>
@@ -10503,7 +10503,7 @@
           <p:cNvPr id="14" name="p16-n4">
             <a:extLst xmlns:a="http://schemas.openxmlformats.org/drawingml/2006/main">
               <a:ext uri="{FF2B5EF4-FFF2-40B4-BE49-F238E27FC236}">
-                <a16:creationId xmlns:a16="http://schemas.microsoft.com/office/drawing/2014/main" id="{707A1E99-925B-4D89-9831-47956FDD7517}"/>
+                <a16:creationId xmlns:a16="http://schemas.microsoft.com/office/drawing/2014/main" id="{B6C3430A-D405-4365-A11A-06445D5A9BCF}"/>
               </a:ext>
             </a:extLst>
           </p:cNvPr>
@@ -10560,7 +10560,7 @@
           <p:cNvPr id="15" name="p16-t4">
             <a:extLst xmlns:a="http://schemas.openxmlformats.org/drawingml/2006/main">
               <a:ext uri="{FF2B5EF4-FFF2-40B4-BE49-F238E27FC236}">
-                <a16:creationId xmlns:a16="http://schemas.microsoft.com/office/drawing/2014/main" id="{0A2B5EED-378C-4288-8667-72E297DF8AB9}"/>
+                <a16:creationId xmlns:a16="http://schemas.microsoft.com/office/drawing/2014/main" id="{3B78769F-266D-4A95-AA9B-E59461D28F33}"/>
               </a:ext>
             </a:extLst>
           </p:cNvPr>
@@ -10619,7 +10619,7 @@
           <p:cNvPr id="16" name="p16-n5">
             <a:extLst xmlns:a="http://schemas.openxmlformats.org/drawingml/2006/main">
               <a:ext uri="{FF2B5EF4-FFF2-40B4-BE49-F238E27FC236}">
-                <a16:creationId xmlns:a16="http://schemas.microsoft.com/office/drawing/2014/main" id="{445037FC-9676-415D-A854-4E618F1212EA}"/>
+                <a16:creationId xmlns:a16="http://schemas.microsoft.com/office/drawing/2014/main" id="{A81E49FA-328D-4EC4-BA3E-04CFC86A2FB4}"/>
               </a:ext>
             </a:extLst>
           </p:cNvPr>
@@ -10676,7 +10676,7 @@
           <p:cNvPr id="17" name="p16-t5">
             <a:extLst xmlns:a="http://schemas.openxmlformats.org/drawingml/2006/main">
               <a:ext uri="{FF2B5EF4-FFF2-40B4-BE49-F238E27FC236}">
-                <a16:creationId xmlns:a16="http://schemas.microsoft.com/office/drawing/2014/main" id="{3561D6D5-384F-445A-93C6-57E8BB67D831}"/>
+                <a16:creationId xmlns:a16="http://schemas.microsoft.com/office/drawing/2014/main" id="{DA2C2897-91AB-4C08-B29A-A65AF5F80126}"/>
               </a:ext>
             </a:extLst>
           </p:cNvPr>
@@ -10735,7 +10735,7 @@
           <p:cNvPr id="18" name="p16-order">
             <a:extLst xmlns:a="http://schemas.openxmlformats.org/drawingml/2006/main">
               <a:ext uri="{FF2B5EF4-FFF2-40B4-BE49-F238E27FC236}">
-                <a16:creationId xmlns:a16="http://schemas.microsoft.com/office/drawing/2014/main" id="{E0E30128-4EA0-49BB-BB2A-48D8592D37F0}"/>
+                <a16:creationId xmlns:a16="http://schemas.microsoft.com/office/drawing/2014/main" id="{F03CAA24-29CB-47E2-AFE5-E0EC6C7730B7}"/>
               </a:ext>
             </a:extLst>
           </p:cNvPr>
@@ -10794,7 +10794,7 @@
           <p:cNvPr id="19" name="p16-write">
             <a:extLst xmlns:a="http://schemas.openxmlformats.org/drawingml/2006/main">
               <a:ext uri="{FF2B5EF4-FFF2-40B4-BE49-F238E27FC236}">
-                <a16:creationId xmlns:a16="http://schemas.microsoft.com/office/drawing/2014/main" id="{EB923752-0C33-4BDA-9DC2-1628C9D70AED}"/>
+                <a16:creationId xmlns:a16="http://schemas.microsoft.com/office/drawing/2014/main" id="{4E5B0C5A-0969-4ADB-B1A3-A3A3694D8D09}"/>
               </a:ext>
             </a:extLst>
           </p:cNvPr>
@@ -10939,7 +10939,7 @@
           <p:cNvPr id="6" name="p17-time">
             <a:extLst xmlns:a="http://schemas.openxmlformats.org/drawingml/2006/main">
               <a:ext uri="{FF2B5EF4-FFF2-40B4-BE49-F238E27FC236}">
-                <a16:creationId xmlns:a16="http://schemas.microsoft.com/office/drawing/2014/main" id="{D27161BE-9B88-40FA-B4A5-45C481D89DDC}"/>
+                <a16:creationId xmlns:a16="http://schemas.microsoft.com/office/drawing/2014/main" id="{DAB2DF9B-8246-4CC1-BA8D-90051415B06B}"/>
               </a:ext>
             </a:extLst>
           </p:cNvPr>
@@ -10994,7 +10994,7 @@
           <p:cNvPr id="7" name="p17-0-h">
             <a:extLst xmlns:a="http://schemas.openxmlformats.org/drawingml/2006/main">
               <a:ext uri="{FF2B5EF4-FFF2-40B4-BE49-F238E27FC236}">
-                <a16:creationId xmlns:a16="http://schemas.microsoft.com/office/drawing/2014/main" id="{9D16CD0C-4916-420F-B691-E1343ACFC103}"/>
+                <a16:creationId xmlns:a16="http://schemas.microsoft.com/office/drawing/2014/main" id="{FF2D0104-7F01-441E-9B97-337AC30AAC53}"/>
               </a:ext>
             </a:extLst>
           </p:cNvPr>
@@ -11051,7 +11051,7 @@
           <p:cNvPr id="8" name="p17-0-d">
             <a:extLst xmlns:a="http://schemas.openxmlformats.org/drawingml/2006/main">
               <a:ext uri="{FF2B5EF4-FFF2-40B4-BE49-F238E27FC236}">
-                <a16:creationId xmlns:a16="http://schemas.microsoft.com/office/drawing/2014/main" id="{A548DEED-BB2D-49C1-93B6-FB661095C766}"/>
+                <a16:creationId xmlns:a16="http://schemas.microsoft.com/office/drawing/2014/main" id="{BAAA89C8-B41F-43F2-B5AC-243EF28372E7}"/>
               </a:ext>
             </a:extLst>
           </p:cNvPr>
@@ -11138,7 +11138,7 @@
           <p:cNvPr id="9" name="p17-1-h">
             <a:extLst xmlns:a="http://schemas.openxmlformats.org/drawingml/2006/main">
               <a:ext uri="{FF2B5EF4-FFF2-40B4-BE49-F238E27FC236}">
-                <a16:creationId xmlns:a16="http://schemas.microsoft.com/office/drawing/2014/main" id="{3DF8F387-CD2B-4284-B5A5-13737D443EBE}"/>
+                <a16:creationId xmlns:a16="http://schemas.microsoft.com/office/drawing/2014/main" id="{BDE932BC-379A-43BC-A62A-AF56ACB835B0}"/>
               </a:ext>
             </a:extLst>
           </p:cNvPr>
@@ -11195,7 +11195,7 @@
           <p:cNvPr id="10" name="p17-1-d">
             <a:extLst xmlns:a="http://schemas.openxmlformats.org/drawingml/2006/main">
               <a:ext uri="{FF2B5EF4-FFF2-40B4-BE49-F238E27FC236}">
-                <a16:creationId xmlns:a16="http://schemas.microsoft.com/office/drawing/2014/main" id="{0B0D1FF3-51F8-4CEA-8F02-C94B791819DB}"/>
+                <a16:creationId xmlns:a16="http://schemas.microsoft.com/office/drawing/2014/main" id="{6C03A12C-21F3-49E7-AABA-01BA72F3072C}"/>
               </a:ext>
             </a:extLst>
           </p:cNvPr>
@@ -11282,7 +11282,7 @@
           <p:cNvPr id="11" name="p17-2-h">
             <a:extLst xmlns:a="http://schemas.openxmlformats.org/drawingml/2006/main">
               <a:ext uri="{FF2B5EF4-FFF2-40B4-BE49-F238E27FC236}">
-                <a16:creationId xmlns:a16="http://schemas.microsoft.com/office/drawing/2014/main" id="{7B12C853-63FD-460E-8E4B-198146C659A3}"/>
+                <a16:creationId xmlns:a16="http://schemas.microsoft.com/office/drawing/2014/main" id="{89DF8C70-6197-49FA-832E-C4DCA8D92BA3}"/>
               </a:ext>
             </a:extLst>
           </p:cNvPr>
@@ -11339,7 +11339,7 @@
           <p:cNvPr id="12" name="p17-2-d">
             <a:extLst xmlns:a="http://schemas.openxmlformats.org/drawingml/2006/main">
               <a:ext uri="{FF2B5EF4-FFF2-40B4-BE49-F238E27FC236}">
-                <a16:creationId xmlns:a16="http://schemas.microsoft.com/office/drawing/2014/main" id="{B4C7351A-8D11-4C3E-A1C9-1A1F95522570}"/>
+                <a16:creationId xmlns:a16="http://schemas.microsoft.com/office/drawing/2014/main" id="{2E2FB13C-73A0-4DE4-87E2-C7C8A96BF133}"/>
               </a:ext>
             </a:extLst>
           </p:cNvPr>
@@ -11426,7 +11426,7 @@
           <p:cNvPr id="13" name="p17-3-h">
             <a:extLst xmlns:a="http://schemas.openxmlformats.org/drawingml/2006/main">
               <a:ext uri="{FF2B5EF4-FFF2-40B4-BE49-F238E27FC236}">
-                <a16:creationId xmlns:a16="http://schemas.microsoft.com/office/drawing/2014/main" id="{FC1B349D-B815-44DC-A634-8F1731E3B41F}"/>
+                <a16:creationId xmlns:a16="http://schemas.microsoft.com/office/drawing/2014/main" id="{A1AC59D6-0FBB-422A-B396-689C82951436}"/>
               </a:ext>
             </a:extLst>
           </p:cNvPr>
@@ -11483,7 +11483,7 @@
           <p:cNvPr id="14" name="p17-3-d">
             <a:extLst xmlns:a="http://schemas.openxmlformats.org/drawingml/2006/main">
               <a:ext uri="{FF2B5EF4-FFF2-40B4-BE49-F238E27FC236}">
-                <a16:creationId xmlns:a16="http://schemas.microsoft.com/office/drawing/2014/main" id="{FA065273-7F19-457F-A8CF-01E5E8D8B25F}"/>
+                <a16:creationId xmlns:a16="http://schemas.microsoft.com/office/drawing/2014/main" id="{491CFC71-BBE6-4C4F-9B51-F1CED341EF2D}"/>
               </a:ext>
             </a:extLst>
           </p:cNvPr>
@@ -11570,7 +11570,7 @@
           <p:cNvPr id="15" name="p17-save">
             <a:extLst xmlns:a="http://schemas.openxmlformats.org/drawingml/2006/main">
               <a:ext uri="{FF2B5EF4-FFF2-40B4-BE49-F238E27FC236}">
-                <a16:creationId xmlns:a16="http://schemas.microsoft.com/office/drawing/2014/main" id="{3E51A063-2F5E-4A69-8B2D-066AA094E6FA}"/>
+                <a16:creationId xmlns:a16="http://schemas.microsoft.com/office/drawing/2014/main" id="{DF17F490-009E-460E-9EB0-DA7591134A5E}"/>
               </a:ext>
             </a:extLst>
           </p:cNvPr>
@@ -11715,7 +11715,7 @@
           <p:cNvPr id="6" name="p18-n0">
             <a:extLst xmlns:a="http://schemas.openxmlformats.org/drawingml/2006/main">
               <a:ext uri="{FF2B5EF4-FFF2-40B4-BE49-F238E27FC236}">
-                <a16:creationId xmlns:a16="http://schemas.microsoft.com/office/drawing/2014/main" id="{CB2EFA26-D294-4385-AC5D-CB34E895CC90}"/>
+                <a16:creationId xmlns:a16="http://schemas.microsoft.com/office/drawing/2014/main" id="{5138BA21-3B92-4ED7-A11D-D29DB37DF114}"/>
               </a:ext>
             </a:extLst>
           </p:cNvPr>
@@ -11772,7 +11772,7 @@
           <p:cNvPr id="7" name="p18-q0">
             <a:extLst xmlns:a="http://schemas.openxmlformats.org/drawingml/2006/main">
               <a:ext uri="{FF2B5EF4-FFF2-40B4-BE49-F238E27FC236}">
-                <a16:creationId xmlns:a16="http://schemas.microsoft.com/office/drawing/2014/main" id="{992A64F8-A532-450A-9CCE-FD01813001DA}"/>
+                <a16:creationId xmlns:a16="http://schemas.microsoft.com/office/drawing/2014/main" id="{8BFF8017-0E5A-4E78-999D-B848A58B2A91}"/>
               </a:ext>
             </a:extLst>
           </p:cNvPr>
@@ -11831,7 +11831,7 @@
           <p:cNvPr id="8" name="p18-n1">
             <a:extLst xmlns:a="http://schemas.openxmlformats.org/drawingml/2006/main">
               <a:ext uri="{FF2B5EF4-FFF2-40B4-BE49-F238E27FC236}">
-                <a16:creationId xmlns:a16="http://schemas.microsoft.com/office/drawing/2014/main" id="{700F2836-CACF-4E4C-80F8-E66ACE3ED350}"/>
+                <a16:creationId xmlns:a16="http://schemas.microsoft.com/office/drawing/2014/main" id="{9A59FA15-5A80-4C14-B7CD-A8F477DC68FF}"/>
               </a:ext>
             </a:extLst>
           </p:cNvPr>
@@ -11888,7 +11888,7 @@
           <p:cNvPr id="9" name="p18-q1">
             <a:extLst xmlns:a="http://schemas.openxmlformats.org/drawingml/2006/main">
               <a:ext uri="{FF2B5EF4-FFF2-40B4-BE49-F238E27FC236}">
-                <a16:creationId xmlns:a16="http://schemas.microsoft.com/office/drawing/2014/main" id="{D22A9608-AE09-4626-BFF0-BF5BC94A939B}"/>
+                <a16:creationId xmlns:a16="http://schemas.microsoft.com/office/drawing/2014/main" id="{627EC9AD-8612-4B7D-B6FE-33FCB252B0C0}"/>
               </a:ext>
             </a:extLst>
           </p:cNvPr>
@@ -11947,7 +11947,7 @@
           <p:cNvPr id="10" name="p18-n2">
             <a:extLst xmlns:a="http://schemas.openxmlformats.org/drawingml/2006/main">
               <a:ext uri="{FF2B5EF4-FFF2-40B4-BE49-F238E27FC236}">
-                <a16:creationId xmlns:a16="http://schemas.microsoft.com/office/drawing/2014/main" id="{F1F11A42-D410-48CA-9F57-DF7BBF9904D2}"/>
+                <a16:creationId xmlns:a16="http://schemas.microsoft.com/office/drawing/2014/main" id="{06507E77-2594-4045-B072-F03EA9FE6315}"/>
               </a:ext>
             </a:extLst>
           </p:cNvPr>
@@ -12004,7 +12004,7 @@
           <p:cNvPr id="11" name="p18-q2">
             <a:extLst xmlns:a="http://schemas.openxmlformats.org/drawingml/2006/main">
               <a:ext uri="{FF2B5EF4-FFF2-40B4-BE49-F238E27FC236}">
-                <a16:creationId xmlns:a16="http://schemas.microsoft.com/office/drawing/2014/main" id="{4A78D450-06EB-4FAA-9645-B72BB464706D}"/>
+                <a16:creationId xmlns:a16="http://schemas.microsoft.com/office/drawing/2014/main" id="{0C504F06-EE9C-4C0D-913A-137EFA1F4A1E}"/>
               </a:ext>
             </a:extLst>
           </p:cNvPr>
@@ -12063,7 +12063,7 @@
           <p:cNvPr id="12" name="p18-n3">
             <a:extLst xmlns:a="http://schemas.openxmlformats.org/drawingml/2006/main">
               <a:ext uri="{FF2B5EF4-FFF2-40B4-BE49-F238E27FC236}">
-                <a16:creationId xmlns:a16="http://schemas.microsoft.com/office/drawing/2014/main" id="{A958DD7B-FF9A-4E4D-9A58-CC4708A674D7}"/>
+                <a16:creationId xmlns:a16="http://schemas.microsoft.com/office/drawing/2014/main" id="{BD84EE60-6590-4391-9F66-36FE00DD3C03}"/>
               </a:ext>
             </a:extLst>
           </p:cNvPr>
@@ -12120,7 +12120,7 @@
           <p:cNvPr id="13" name="p18-q3">
             <a:extLst xmlns:a="http://schemas.openxmlformats.org/drawingml/2006/main">
               <a:ext uri="{FF2B5EF4-FFF2-40B4-BE49-F238E27FC236}">
-                <a16:creationId xmlns:a16="http://schemas.microsoft.com/office/drawing/2014/main" id="{43932A7B-AB22-4AAC-8A7E-C2BFDB9FDDDA}"/>
+                <a16:creationId xmlns:a16="http://schemas.microsoft.com/office/drawing/2014/main" id="{0D9B5D16-B529-4355-94B7-AD4F3F88ADF9}"/>
               </a:ext>
             </a:extLst>
           </p:cNvPr>
@@ -12179,7 +12179,7 @@
           <p:cNvPr id="14" name="p18-n4">
             <a:extLst xmlns:a="http://schemas.openxmlformats.org/drawingml/2006/main">
               <a:ext uri="{FF2B5EF4-FFF2-40B4-BE49-F238E27FC236}">
-                <a16:creationId xmlns:a16="http://schemas.microsoft.com/office/drawing/2014/main" id="{FBE028B1-AB20-43BE-9879-05CB9274F846}"/>
+                <a16:creationId xmlns:a16="http://schemas.microsoft.com/office/drawing/2014/main" id="{E3F344D8-AB29-4AD2-AACC-00A6163C4140}"/>
               </a:ext>
             </a:extLst>
           </p:cNvPr>
@@ -12236,7 +12236,7 @@
           <p:cNvPr id="15" name="p18-q4">
             <a:extLst xmlns:a="http://schemas.openxmlformats.org/drawingml/2006/main">
               <a:ext uri="{FF2B5EF4-FFF2-40B4-BE49-F238E27FC236}">
-                <a16:creationId xmlns:a16="http://schemas.microsoft.com/office/drawing/2014/main" id="{8B65D668-14C7-445E-85EF-E5EBB3025FCC}"/>
+                <a16:creationId xmlns:a16="http://schemas.microsoft.com/office/drawing/2014/main" id="{EE4A1A7B-7024-4FD7-8518-60150259E2E2}"/>
               </a:ext>
             </a:extLst>
           </p:cNvPr>
@@ -12295,7 +12295,7 @@
           <p:cNvPr id="16" name="p18-author">
             <a:extLst xmlns:a="http://schemas.openxmlformats.org/drawingml/2006/main">
               <a:ext uri="{FF2B5EF4-FFF2-40B4-BE49-F238E27FC236}">
-                <a16:creationId xmlns:a16="http://schemas.microsoft.com/office/drawing/2014/main" id="{3A22EA35-EB3E-4FB5-8693-B32951C9D054}"/>
+                <a16:creationId xmlns:a16="http://schemas.microsoft.com/office/drawing/2014/main" id="{582ECA2D-99F9-458C-9213-F58DAFC68D7C}"/>
               </a:ext>
             </a:extLst>
           </p:cNvPr>
@@ -12350,7 +12350,7 @@
           <p:cNvPr id="17" name="p18-s0">
             <a:extLst xmlns:a="http://schemas.openxmlformats.org/drawingml/2006/main">
               <a:ext uri="{FF2B5EF4-FFF2-40B4-BE49-F238E27FC236}">
-                <a16:creationId xmlns:a16="http://schemas.microsoft.com/office/drawing/2014/main" id="{D476BBFA-22F1-4F43-A862-F1FD109411B3}"/>
+                <a16:creationId xmlns:a16="http://schemas.microsoft.com/office/drawing/2014/main" id="{5C171A32-10A1-4C8E-81C8-8C4D5073F711}"/>
               </a:ext>
             </a:extLst>
           </p:cNvPr>
@@ -12407,7 +12407,7 @@
           <p:cNvPr id="18" name="p18-s1">
             <a:extLst xmlns:a="http://schemas.openxmlformats.org/drawingml/2006/main">
               <a:ext uri="{FF2B5EF4-FFF2-40B4-BE49-F238E27FC236}">
-                <a16:creationId xmlns:a16="http://schemas.microsoft.com/office/drawing/2014/main" id="{7D567709-7246-4C4B-A8BA-D5AA03DFE41D}"/>
+                <a16:creationId xmlns:a16="http://schemas.microsoft.com/office/drawing/2014/main" id="{19D9D03B-0940-41E4-AF2F-49B3A21C8AF0}"/>
               </a:ext>
             </a:extLst>
           </p:cNvPr>
@@ -12464,7 +12464,7 @@
           <p:cNvPr id="19" name="p18-s2">
             <a:extLst xmlns:a="http://schemas.openxmlformats.org/drawingml/2006/main">
               <a:ext uri="{FF2B5EF4-FFF2-40B4-BE49-F238E27FC236}">
-                <a16:creationId xmlns:a16="http://schemas.microsoft.com/office/drawing/2014/main" id="{6BD7C8BD-161C-4088-8C88-C37B9F07005B}"/>
+                <a16:creationId xmlns:a16="http://schemas.microsoft.com/office/drawing/2014/main" id="{279C5513-2E9F-47CF-935A-2294BB28D05A}"/>
               </a:ext>
             </a:extLst>
           </p:cNvPr>
@@ -12521,7 +12521,7 @@
           <p:cNvPr id="20" name="p18-bottom">
             <a:extLst xmlns:a="http://schemas.openxmlformats.org/drawingml/2006/main">
               <a:ext uri="{FF2B5EF4-FFF2-40B4-BE49-F238E27FC236}">
-                <a16:creationId xmlns:a16="http://schemas.microsoft.com/office/drawing/2014/main" id="{883EC5AE-11D6-4CB0-9B3C-073B88FE7503}"/>
+                <a16:creationId xmlns:a16="http://schemas.microsoft.com/office/drawing/2014/main" id="{0DC92C61-844D-4C96-AC31-3FE1AB2A26AB}"/>
               </a:ext>
             </a:extLst>
           </p:cNvPr>
@@ -12666,7 +12666,7 @@
           <p:cNvPr id="6" name="p19-submit">
             <a:extLst xmlns:a="http://schemas.openxmlformats.org/drawingml/2006/main">
               <a:ext uri="{FF2B5EF4-FFF2-40B4-BE49-F238E27FC236}">
-                <a16:creationId xmlns:a16="http://schemas.microsoft.com/office/drawing/2014/main" id="{F1CF85E1-9CE5-4AB2-B0BA-EF970CC2F88B}"/>
+                <a16:creationId xmlns:a16="http://schemas.microsoft.com/office/drawing/2014/main" id="{A37E476F-31A5-427D-B928-E071AA87CDF9}"/>
               </a:ext>
             </a:extLst>
           </p:cNvPr>
@@ -12723,7 +12723,7 @@
           <p:cNvPr id="7" name="p19-how">
             <a:extLst xmlns:a="http://schemas.openxmlformats.org/drawingml/2006/main">
               <a:ext uri="{FF2B5EF4-FFF2-40B4-BE49-F238E27FC236}">
-                <a16:creationId xmlns:a16="http://schemas.microsoft.com/office/drawing/2014/main" id="{A06A8F90-FA08-47BC-8A80-F344BE68A35F}"/>
+                <a16:creationId xmlns:a16="http://schemas.microsoft.com/office/drawing/2014/main" id="{96DF6A0D-2AB5-4127-AF49-AACA3555AB20}"/>
               </a:ext>
             </a:extLst>
           </p:cNvPr>
@@ -12802,7 +12802,7 @@
           <p:cNvPr id="8" name="p19-no">
             <a:extLst xmlns:a="http://schemas.openxmlformats.org/drawingml/2006/main">
               <a:ext uri="{FF2B5EF4-FFF2-40B4-BE49-F238E27FC236}">
-                <a16:creationId xmlns:a16="http://schemas.microsoft.com/office/drawing/2014/main" id="{21706F83-4C06-4A0A-8E10-8513C3E64793}"/>
+                <a16:creationId xmlns:a16="http://schemas.microsoft.com/office/drawing/2014/main" id="{DD498545-F8DA-4821-9F58-CF9A439CACBD}"/>
               </a:ext>
             </a:extLst>
           </p:cNvPr>
@@ -12857,7 +12857,7 @@
           <p:cNvPr id="9" name="p19-h0">
             <a:extLst xmlns:a="http://schemas.openxmlformats.org/drawingml/2006/main">
               <a:ext uri="{FF2B5EF4-FFF2-40B4-BE49-F238E27FC236}">
-                <a16:creationId xmlns:a16="http://schemas.microsoft.com/office/drawing/2014/main" id="{1531BC32-CED7-4AA8-8915-35D1AFED6086}"/>
+                <a16:creationId xmlns:a16="http://schemas.microsoft.com/office/drawing/2014/main" id="{4CFA540F-8FC8-445C-B705-CB114E861352}"/>
               </a:ext>
             </a:extLst>
           </p:cNvPr>
@@ -12914,7 +12914,7 @@
           <p:cNvPr id="10" name="p19-a0">
             <a:extLst xmlns:a="http://schemas.openxmlformats.org/drawingml/2006/main">
               <a:ext uri="{FF2B5EF4-FFF2-40B4-BE49-F238E27FC236}">
-                <a16:creationId xmlns:a16="http://schemas.microsoft.com/office/drawing/2014/main" id="{1BBA7874-1D7E-4997-BC56-FEC386DE650E}"/>
+                <a16:creationId xmlns:a16="http://schemas.microsoft.com/office/drawing/2014/main" id="{7A07E54A-6C37-4AE5-92CD-A027BB5DB9AF}"/>
               </a:ext>
             </a:extLst>
           </p:cNvPr>
@@ -12967,7 +12967,7 @@
           <p:cNvPr id="11" name="p19-d0">
             <a:extLst xmlns:a="http://schemas.openxmlformats.org/drawingml/2006/main">
               <a:ext uri="{FF2B5EF4-FFF2-40B4-BE49-F238E27FC236}">
-                <a16:creationId xmlns:a16="http://schemas.microsoft.com/office/drawing/2014/main" id="{A3F47867-1C07-483B-BD67-647A0E742A94}"/>
+                <a16:creationId xmlns:a16="http://schemas.microsoft.com/office/drawing/2014/main" id="{464C2ED2-F6FA-4CD5-B5C3-2A2826E1FD0F}"/>
               </a:ext>
             </a:extLst>
           </p:cNvPr>
@@ -13026,7 +13026,7 @@
           <p:cNvPr id="12" name="p19-h1">
             <a:extLst xmlns:a="http://schemas.openxmlformats.org/drawingml/2006/main">
               <a:ext uri="{FF2B5EF4-FFF2-40B4-BE49-F238E27FC236}">
-                <a16:creationId xmlns:a16="http://schemas.microsoft.com/office/drawing/2014/main" id="{92ED5FB6-116C-42D2-80F1-B887BEF95721}"/>
+                <a16:creationId xmlns:a16="http://schemas.microsoft.com/office/drawing/2014/main" id="{2F8071B0-DE5E-4360-90F7-442D59514EAE}"/>
               </a:ext>
             </a:extLst>
           </p:cNvPr>
@@ -13083,7 +13083,7 @@
           <p:cNvPr id="13" name="p19-a1">
             <a:extLst xmlns:a="http://schemas.openxmlformats.org/drawingml/2006/main">
               <a:ext uri="{FF2B5EF4-FFF2-40B4-BE49-F238E27FC236}">
-                <a16:creationId xmlns:a16="http://schemas.microsoft.com/office/drawing/2014/main" id="{9900ED55-B839-418C-BD48-6C3B53E007D7}"/>
+                <a16:creationId xmlns:a16="http://schemas.microsoft.com/office/drawing/2014/main" id="{CFB72B2E-7F6A-4EEA-968D-B0EA69A627CB}"/>
               </a:ext>
             </a:extLst>
           </p:cNvPr>
@@ -13136,7 +13136,7 @@
           <p:cNvPr id="14" name="p19-d1">
             <a:extLst xmlns:a="http://schemas.openxmlformats.org/drawingml/2006/main">
               <a:ext uri="{FF2B5EF4-FFF2-40B4-BE49-F238E27FC236}">
-                <a16:creationId xmlns:a16="http://schemas.microsoft.com/office/drawing/2014/main" id="{A9DC0CC5-17A7-43E2-8727-96F8B2D540B1}"/>
+                <a16:creationId xmlns:a16="http://schemas.microsoft.com/office/drawing/2014/main" id="{95846CB0-1D7E-405B-B297-4CC98BEE269A}"/>
               </a:ext>
             </a:extLst>
           </p:cNvPr>
@@ -13195,7 +13195,7 @@
           <p:cNvPr id="15" name="p19-h2">
             <a:extLst xmlns:a="http://schemas.openxmlformats.org/drawingml/2006/main">
               <a:ext uri="{FF2B5EF4-FFF2-40B4-BE49-F238E27FC236}">
-                <a16:creationId xmlns:a16="http://schemas.microsoft.com/office/drawing/2014/main" id="{134717AD-B76A-4DA7-8A50-725BEB4650F5}"/>
+                <a16:creationId xmlns:a16="http://schemas.microsoft.com/office/drawing/2014/main" id="{D324A5F9-C53A-4D54-B765-113DC989E61A}"/>
               </a:ext>
             </a:extLst>
           </p:cNvPr>
@@ -13252,7 +13252,7 @@
           <p:cNvPr id="16" name="p19-a2">
             <a:extLst xmlns:a="http://schemas.openxmlformats.org/drawingml/2006/main">
               <a:ext uri="{FF2B5EF4-FFF2-40B4-BE49-F238E27FC236}">
-                <a16:creationId xmlns:a16="http://schemas.microsoft.com/office/drawing/2014/main" id="{923E5D71-BB91-426B-A278-50F2BF2E25FD}"/>
+                <a16:creationId xmlns:a16="http://schemas.microsoft.com/office/drawing/2014/main" id="{8568882A-B756-4D15-81D8-5283071B071E}"/>
               </a:ext>
             </a:extLst>
           </p:cNvPr>
@@ -13305,7 +13305,7 @@
           <p:cNvPr id="17" name="p19-d2">
             <a:extLst xmlns:a="http://schemas.openxmlformats.org/drawingml/2006/main">
               <a:ext uri="{FF2B5EF4-FFF2-40B4-BE49-F238E27FC236}">
-                <a16:creationId xmlns:a16="http://schemas.microsoft.com/office/drawing/2014/main" id="{D3BFA344-B795-4707-93A1-2982A8F293FE}"/>
+                <a16:creationId xmlns:a16="http://schemas.microsoft.com/office/drawing/2014/main" id="{CBDEF8CF-39D1-4CFF-B3A2-228ACC0E5E11}"/>
               </a:ext>
             </a:extLst>
           </p:cNvPr>
@@ -13364,7 +13364,7 @@
           <p:cNvPr id="18" name="p19-h3">
             <a:extLst xmlns:a="http://schemas.openxmlformats.org/drawingml/2006/main">
               <a:ext uri="{FF2B5EF4-FFF2-40B4-BE49-F238E27FC236}">
-                <a16:creationId xmlns:a16="http://schemas.microsoft.com/office/drawing/2014/main" id="{12DF69CA-DB2B-488C-9FEA-9594BC131336}"/>
+                <a16:creationId xmlns:a16="http://schemas.microsoft.com/office/drawing/2014/main" id="{C7D3BA21-B04F-4DDE-B53F-5BC6EACC00CC}"/>
               </a:ext>
             </a:extLst>
           </p:cNvPr>
@@ -13421,7 +13421,7 @@
           <p:cNvPr id="19" name="p19-a3">
             <a:extLst xmlns:a="http://schemas.openxmlformats.org/drawingml/2006/main">
               <a:ext uri="{FF2B5EF4-FFF2-40B4-BE49-F238E27FC236}">
-                <a16:creationId xmlns:a16="http://schemas.microsoft.com/office/drawing/2014/main" id="{A8725151-C394-4F84-AFCF-5D499D4B3B39}"/>
+                <a16:creationId xmlns:a16="http://schemas.microsoft.com/office/drawing/2014/main" id="{6F536348-DF3D-47B3-968A-EBF05A5E0C53}"/>
               </a:ext>
             </a:extLst>
           </p:cNvPr>
@@ -13474,7 +13474,7 @@
           <p:cNvPr id="20" name="p19-d3">
             <a:extLst xmlns:a="http://schemas.openxmlformats.org/drawingml/2006/main">
               <a:ext uri="{FF2B5EF4-FFF2-40B4-BE49-F238E27FC236}">
-                <a16:creationId xmlns:a16="http://schemas.microsoft.com/office/drawing/2014/main" id="{F749C41B-EFCC-4604-9946-0A1DE576E445}"/>
+                <a16:creationId xmlns:a16="http://schemas.microsoft.com/office/drawing/2014/main" id="{C98D0816-CE8D-4075-8082-105D872641A9}"/>
               </a:ext>
             </a:extLst>
           </p:cNvPr>
@@ -13533,7 +13533,7 @@
           <p:cNvPr id="21" name="p19-bottom">
             <a:extLst xmlns:a="http://schemas.openxmlformats.org/drawingml/2006/main">
               <a:ext uri="{FF2B5EF4-FFF2-40B4-BE49-F238E27FC236}">
-                <a16:creationId xmlns:a16="http://schemas.microsoft.com/office/drawing/2014/main" id="{446606E8-5597-4222-AE62-B1CFE182C64E}"/>
+                <a16:creationId xmlns:a16="http://schemas.microsoft.com/office/drawing/2014/main" id="{9C02FDAC-D4E4-4A57-8EBE-D41EDD099188}"/>
               </a:ext>
             </a:extLst>
           </p:cNvPr>
@@ -13678,7 +13678,7 @@
           <p:cNvPr id="6" name="p02-have">
             <a:extLst xmlns:a="http://schemas.openxmlformats.org/drawingml/2006/main">
               <a:ext uri="{FF2B5EF4-FFF2-40B4-BE49-F238E27FC236}">
-                <a16:creationId xmlns:a16="http://schemas.microsoft.com/office/drawing/2014/main" id="{2157C3D2-1ACD-4B88-B4A2-30ACFEBAE8EE}"/>
+                <a16:creationId xmlns:a16="http://schemas.microsoft.com/office/drawing/2014/main" id="{7F1E70F1-B8B6-4EB3-B697-E1990FA6ABB9}"/>
               </a:ext>
             </a:extLst>
           </p:cNvPr>
@@ -13733,7 +13733,7 @@
           <p:cNvPr id="7" name="p02-h0">
             <a:extLst xmlns:a="http://schemas.openxmlformats.org/drawingml/2006/main">
               <a:ext uri="{FF2B5EF4-FFF2-40B4-BE49-F238E27FC236}">
-                <a16:creationId xmlns:a16="http://schemas.microsoft.com/office/drawing/2014/main" id="{73403954-F67E-4556-80F5-7ABFEF4D07B2}"/>
+                <a16:creationId xmlns:a16="http://schemas.microsoft.com/office/drawing/2014/main" id="{8BE62ED5-EF7A-49C8-8BEB-6F6E975AD07D}"/>
               </a:ext>
             </a:extLst>
           </p:cNvPr>
@@ -13792,7 +13792,7 @@
           <p:cNvPr id="8" name="p02-h1">
             <a:extLst xmlns:a="http://schemas.openxmlformats.org/drawingml/2006/main">
               <a:ext uri="{FF2B5EF4-FFF2-40B4-BE49-F238E27FC236}">
-                <a16:creationId xmlns:a16="http://schemas.microsoft.com/office/drawing/2014/main" id="{4B13C1C9-963E-4BEB-A445-CD6FA9B4F235}"/>
+                <a16:creationId xmlns:a16="http://schemas.microsoft.com/office/drawing/2014/main" id="{0FF10094-82AA-4254-A9B9-D76159EDC54C}"/>
               </a:ext>
             </a:extLst>
           </p:cNvPr>
@@ -13851,7 +13851,7 @@
           <p:cNvPr id="9" name="p02-a">
             <a:extLst xmlns:a="http://schemas.openxmlformats.org/drawingml/2006/main">
               <a:ext uri="{FF2B5EF4-FFF2-40B4-BE49-F238E27FC236}">
-                <a16:creationId xmlns:a16="http://schemas.microsoft.com/office/drawing/2014/main" id="{EFAE6C1A-C4DF-4FC8-8246-F3CAB172F18F}"/>
+                <a16:creationId xmlns:a16="http://schemas.microsoft.com/office/drawing/2014/main" id="{3DCDA6C1-B0AA-4CFC-ACB3-B7BA4A198BC8}"/>
               </a:ext>
             </a:extLst>
           </p:cNvPr>
@@ -13904,7 +13904,7 @@
           <p:cNvPr id="10" name="p02-miss">
             <a:extLst xmlns:a="http://schemas.openxmlformats.org/drawingml/2006/main">
               <a:ext uri="{FF2B5EF4-FFF2-40B4-BE49-F238E27FC236}">
-                <a16:creationId xmlns:a16="http://schemas.microsoft.com/office/drawing/2014/main" id="{D2119665-2BA8-4B15-A740-AB58A5B11B30}"/>
+                <a16:creationId xmlns:a16="http://schemas.microsoft.com/office/drawing/2014/main" id="{94F44E5E-5767-4D1B-BEE9-85CAC7627BD2}"/>
               </a:ext>
             </a:extLst>
           </p:cNvPr>
@@ -13959,7 +13959,7 @@
           <p:cNvPr id="11" name="p02-m0">
             <a:extLst xmlns:a="http://schemas.openxmlformats.org/drawingml/2006/main">
               <a:ext uri="{FF2B5EF4-FFF2-40B4-BE49-F238E27FC236}">
-                <a16:creationId xmlns:a16="http://schemas.microsoft.com/office/drawing/2014/main" id="{01E399A6-7C87-419E-A62C-B80501E97AB4}"/>
+                <a16:creationId xmlns:a16="http://schemas.microsoft.com/office/drawing/2014/main" id="{F66059D1-09E1-4A5B-81D9-AEB3E5829099}"/>
               </a:ext>
             </a:extLst>
           </p:cNvPr>
@@ -14018,7 +14018,7 @@
           <p:cNvPr id="12" name="p02-m1">
             <a:extLst xmlns:a="http://schemas.openxmlformats.org/drawingml/2006/main">
               <a:ext uri="{FF2B5EF4-FFF2-40B4-BE49-F238E27FC236}">
-                <a16:creationId xmlns:a16="http://schemas.microsoft.com/office/drawing/2014/main" id="{6EF70F56-EBD0-48C5-AC78-A4A0942EA9C3}"/>
+                <a16:creationId xmlns:a16="http://schemas.microsoft.com/office/drawing/2014/main" id="{B68A93A7-1930-4C1F-B71D-EBE85F025F8C}"/>
               </a:ext>
             </a:extLst>
           </p:cNvPr>
@@ -14077,7 +14077,7 @@
           <p:cNvPr id="13" name="p02-m2">
             <a:extLst xmlns:a="http://schemas.openxmlformats.org/drawingml/2006/main">
               <a:ext uri="{FF2B5EF4-FFF2-40B4-BE49-F238E27FC236}">
-                <a16:creationId xmlns:a16="http://schemas.microsoft.com/office/drawing/2014/main" id="{3E670B62-D002-4D3B-BF4B-F2C8ACD9461E}"/>
+                <a16:creationId xmlns:a16="http://schemas.microsoft.com/office/drawing/2014/main" id="{96FA89D2-E74B-4F43-9B26-2E56B6D363FF}"/>
               </a:ext>
             </a:extLst>
           </p:cNvPr>
@@ -14136,7 +14136,7 @@
           <p:cNvPr id="14" name="p02-bottom">
             <a:extLst xmlns:a="http://schemas.openxmlformats.org/drawingml/2006/main">
               <a:ext uri="{FF2B5EF4-FFF2-40B4-BE49-F238E27FC236}">
-                <a16:creationId xmlns:a16="http://schemas.microsoft.com/office/drawing/2014/main" id="{71DE00CF-987E-43FD-A8E2-2D460FE8D507}"/>
+                <a16:creationId xmlns:a16="http://schemas.microsoft.com/office/drawing/2014/main" id="{78E62FDE-CF00-4A40-858D-9D4CD227F4D5}"/>
               </a:ext>
             </a:extLst>
           </p:cNvPr>
@@ -14283,7 +14283,7 @@
           <p:cNvPr id="6" name="p20-f0">
             <a:extLst xmlns:a="http://schemas.openxmlformats.org/drawingml/2006/main">
               <a:ext uri="{FF2B5EF4-FFF2-40B4-BE49-F238E27FC236}">
-                <a16:creationId xmlns:a16="http://schemas.microsoft.com/office/drawing/2014/main" id="{31FB76C7-5E65-4B29-8CC5-572E7FD3F944}"/>
+                <a16:creationId xmlns:a16="http://schemas.microsoft.com/office/drawing/2014/main" id="{F25A1A45-4980-4493-8EC4-1189ED23489F}"/>
               </a:ext>
             </a:extLst>
           </p:cNvPr>
@@ -14342,7 +14342,7 @@
           <p:cNvPr id="7" name="p20-a0">
             <a:extLst xmlns:a="http://schemas.openxmlformats.org/drawingml/2006/main">
               <a:ext uri="{FF2B5EF4-FFF2-40B4-BE49-F238E27FC236}">
-                <a16:creationId xmlns:a16="http://schemas.microsoft.com/office/drawing/2014/main" id="{7716449D-7FE5-487F-BCAC-A8C42DE0A8AC}"/>
+                <a16:creationId xmlns:a16="http://schemas.microsoft.com/office/drawing/2014/main" id="{D3E849BC-2754-456D-A4EC-24FA5836394E}"/>
               </a:ext>
             </a:extLst>
           </p:cNvPr>
@@ -14395,7 +14395,7 @@
           <p:cNvPr id="8" name="p20-f1">
             <a:extLst xmlns:a="http://schemas.openxmlformats.org/drawingml/2006/main">
               <a:ext uri="{FF2B5EF4-FFF2-40B4-BE49-F238E27FC236}">
-                <a16:creationId xmlns:a16="http://schemas.microsoft.com/office/drawing/2014/main" id="{48AA655C-9172-47A2-83A7-9B967BA207B1}"/>
+                <a16:creationId xmlns:a16="http://schemas.microsoft.com/office/drawing/2014/main" id="{DD7DFD51-2FD4-4BD6-9F57-2AEC44135408}"/>
               </a:ext>
             </a:extLst>
           </p:cNvPr>
@@ -14454,7 +14454,7 @@
           <p:cNvPr id="9" name="p20-a1">
             <a:extLst xmlns:a="http://schemas.openxmlformats.org/drawingml/2006/main">
               <a:ext uri="{FF2B5EF4-FFF2-40B4-BE49-F238E27FC236}">
-                <a16:creationId xmlns:a16="http://schemas.microsoft.com/office/drawing/2014/main" id="{9440AC3A-9901-4C65-95C7-BD712304EA1C}"/>
+                <a16:creationId xmlns:a16="http://schemas.microsoft.com/office/drawing/2014/main" id="{DF9A5E19-6E85-4234-B84D-B99754D49822}"/>
               </a:ext>
             </a:extLst>
           </p:cNvPr>
@@ -14507,7 +14507,7 @@
           <p:cNvPr id="10" name="p20-f2">
             <a:extLst xmlns:a="http://schemas.openxmlformats.org/drawingml/2006/main">
               <a:ext uri="{FF2B5EF4-FFF2-40B4-BE49-F238E27FC236}">
-                <a16:creationId xmlns:a16="http://schemas.microsoft.com/office/drawing/2014/main" id="{B7DF4F74-8D20-4F56-9779-0385C7F19358}"/>
+                <a16:creationId xmlns:a16="http://schemas.microsoft.com/office/drawing/2014/main" id="{FAC65D1F-8201-4656-A17C-7A49E38EE9EF}"/>
               </a:ext>
             </a:extLst>
           </p:cNvPr>
@@ -14586,7 +14586,7 @@
           <p:cNvPr id="11" name="p20-a2">
             <a:extLst xmlns:a="http://schemas.openxmlformats.org/drawingml/2006/main">
               <a:ext uri="{FF2B5EF4-FFF2-40B4-BE49-F238E27FC236}">
-                <a16:creationId xmlns:a16="http://schemas.microsoft.com/office/drawing/2014/main" id="{2F14FF60-F64C-4DC0-8988-D116B6CAB81D}"/>
+                <a16:creationId xmlns:a16="http://schemas.microsoft.com/office/drawing/2014/main" id="{AC53BD5E-960C-4125-AB7C-1BF461FD1DBA}"/>
               </a:ext>
             </a:extLst>
           </p:cNvPr>
@@ -14639,7 +14639,7 @@
           <p:cNvPr id="12" name="p20-f3">
             <a:extLst xmlns:a="http://schemas.openxmlformats.org/drawingml/2006/main">
               <a:ext uri="{FF2B5EF4-FFF2-40B4-BE49-F238E27FC236}">
-                <a16:creationId xmlns:a16="http://schemas.microsoft.com/office/drawing/2014/main" id="{0384E817-3301-47A1-A66E-5ACC17C1A05D}"/>
+                <a16:creationId xmlns:a16="http://schemas.microsoft.com/office/drawing/2014/main" id="{B61A445B-C56C-498F-9D05-C3BCF04CF60E}"/>
               </a:ext>
             </a:extLst>
           </p:cNvPr>
@@ -14718,7 +14718,7 @@
           <p:cNvPr id="13" name="p20-exit">
             <a:extLst xmlns:a="http://schemas.openxmlformats.org/drawingml/2006/main">
               <a:ext uri="{FF2B5EF4-FFF2-40B4-BE49-F238E27FC236}">
-                <a16:creationId xmlns:a16="http://schemas.microsoft.com/office/drawing/2014/main" id="{5A406C44-016E-40B5-A24D-9797A9B8E024}"/>
+                <a16:creationId xmlns:a16="http://schemas.microsoft.com/office/drawing/2014/main" id="{945A4FE1-7153-4907-9CB3-094483205FD7}"/>
               </a:ext>
             </a:extLst>
           </p:cNvPr>
@@ -14775,7 +14775,7 @@
           <p:cNvPr id="14" name="p20-q0">
             <a:extLst xmlns:a="http://schemas.openxmlformats.org/drawingml/2006/main">
               <a:ext uri="{FF2B5EF4-FFF2-40B4-BE49-F238E27FC236}">
-                <a16:creationId xmlns:a16="http://schemas.microsoft.com/office/drawing/2014/main" id="{6D6D0246-A75C-43DF-91A2-FCD7E77511FC}"/>
+                <a16:creationId xmlns:a16="http://schemas.microsoft.com/office/drawing/2014/main" id="{CC0509F1-A011-436E-A7AD-6F3432235C07}"/>
               </a:ext>
             </a:extLst>
           </p:cNvPr>
@@ -14834,7 +14834,7 @@
           <p:cNvPr id="15" name="p20-q1">
             <a:extLst xmlns:a="http://schemas.openxmlformats.org/drawingml/2006/main">
               <a:ext uri="{FF2B5EF4-FFF2-40B4-BE49-F238E27FC236}">
-                <a16:creationId xmlns:a16="http://schemas.microsoft.com/office/drawing/2014/main" id="{3AF0F92C-8CD7-4FB1-A2BF-2BE67384BD81}"/>
+                <a16:creationId xmlns:a16="http://schemas.microsoft.com/office/drawing/2014/main" id="{72D7233A-BE0F-4BEF-904F-1A6E336DE078}"/>
               </a:ext>
             </a:extLst>
           </p:cNvPr>
@@ -14893,7 +14893,7 @@
           <p:cNvPr id="16" name="p20-q2">
             <a:extLst xmlns:a="http://schemas.openxmlformats.org/drawingml/2006/main">
               <a:ext uri="{FF2B5EF4-FFF2-40B4-BE49-F238E27FC236}">
-                <a16:creationId xmlns:a16="http://schemas.microsoft.com/office/drawing/2014/main" id="{8E458D3C-1CAF-4074-90C1-4066DE131CDF}"/>
+                <a16:creationId xmlns:a16="http://schemas.microsoft.com/office/drawing/2014/main" id="{D24AE0AD-07EF-46A1-A18E-2A03B4BB1DED}"/>
               </a:ext>
             </a:extLst>
           </p:cNvPr>
@@ -14952,7 +14952,7 @@
           <p:cNvPr id="17" name="p20-bottom">
             <a:extLst xmlns:a="http://schemas.openxmlformats.org/drawingml/2006/main">
               <a:ext uri="{FF2B5EF4-FFF2-40B4-BE49-F238E27FC236}">
-                <a16:creationId xmlns:a16="http://schemas.microsoft.com/office/drawing/2014/main" id="{7BE0DA36-1D76-49EA-863E-00753BF7889B}"/>
+                <a16:creationId xmlns:a16="http://schemas.microsoft.com/office/drawing/2014/main" id="{9713643A-2858-48FD-834B-7DD485060D80}"/>
               </a:ext>
             </a:extLst>
           </p:cNvPr>
@@ -15097,7 +15097,7 @@
           <p:cNvPr id="6" name="p03-n0">
             <a:extLst xmlns:a="http://schemas.openxmlformats.org/drawingml/2006/main">
               <a:ext uri="{FF2B5EF4-FFF2-40B4-BE49-F238E27FC236}">
-                <a16:creationId xmlns:a16="http://schemas.microsoft.com/office/drawing/2014/main" id="{74315B65-B025-470E-90E9-67E45B3A7271}"/>
+                <a16:creationId xmlns:a16="http://schemas.microsoft.com/office/drawing/2014/main" id="{4DC13CD1-8CB0-4BA3-80A7-9750CFB1F122}"/>
               </a:ext>
             </a:extLst>
           </p:cNvPr>
@@ -15154,7 +15154,7 @@
           <p:cNvPr id="7" name="p03-g0">
             <a:extLst xmlns:a="http://schemas.openxmlformats.org/drawingml/2006/main">
               <a:ext uri="{FF2B5EF4-FFF2-40B4-BE49-F238E27FC236}">
-                <a16:creationId xmlns:a16="http://schemas.microsoft.com/office/drawing/2014/main" id="{2271C0A2-006D-4E5C-AE09-3BA5A2546888}"/>
+                <a16:creationId xmlns:a16="http://schemas.microsoft.com/office/drawing/2014/main" id="{BAF404CC-1594-4B60-9BD4-B4EBEEB116C7}"/>
               </a:ext>
             </a:extLst>
           </p:cNvPr>
@@ -15213,7 +15213,7 @@
           <p:cNvPr id="8" name="p03-n1">
             <a:extLst xmlns:a="http://schemas.openxmlformats.org/drawingml/2006/main">
               <a:ext uri="{FF2B5EF4-FFF2-40B4-BE49-F238E27FC236}">
-                <a16:creationId xmlns:a16="http://schemas.microsoft.com/office/drawing/2014/main" id="{52DD0B7E-D109-4921-8D08-007BCB09B86D}"/>
+                <a16:creationId xmlns:a16="http://schemas.microsoft.com/office/drawing/2014/main" id="{7ADBC6C0-50B9-45D3-9FF6-4CF7FBA336BD}"/>
               </a:ext>
             </a:extLst>
           </p:cNvPr>
@@ -15270,7 +15270,7 @@
           <p:cNvPr id="9" name="p03-g1">
             <a:extLst xmlns:a="http://schemas.openxmlformats.org/drawingml/2006/main">
               <a:ext uri="{FF2B5EF4-FFF2-40B4-BE49-F238E27FC236}">
-                <a16:creationId xmlns:a16="http://schemas.microsoft.com/office/drawing/2014/main" id="{5D24FCA6-D03B-4F68-9D8B-C5FFBAFE8650}"/>
+                <a16:creationId xmlns:a16="http://schemas.microsoft.com/office/drawing/2014/main" id="{5AB199C4-1C76-41F0-9C1D-9DC16060B3A6}"/>
               </a:ext>
             </a:extLst>
           </p:cNvPr>
@@ -15329,7 +15329,7 @@
           <p:cNvPr id="10" name="p03-n2">
             <a:extLst xmlns:a="http://schemas.openxmlformats.org/drawingml/2006/main">
               <a:ext uri="{FF2B5EF4-FFF2-40B4-BE49-F238E27FC236}">
-                <a16:creationId xmlns:a16="http://schemas.microsoft.com/office/drawing/2014/main" id="{CC9E2D45-47D8-4AE0-9FF0-2251C73B7CE3}"/>
+                <a16:creationId xmlns:a16="http://schemas.microsoft.com/office/drawing/2014/main" id="{7180996F-BA5C-4B72-91EF-329046F35203}"/>
               </a:ext>
             </a:extLst>
           </p:cNvPr>
@@ -15386,7 +15386,7 @@
           <p:cNvPr id="11" name="p03-g2">
             <a:extLst xmlns:a="http://schemas.openxmlformats.org/drawingml/2006/main">
               <a:ext uri="{FF2B5EF4-FFF2-40B4-BE49-F238E27FC236}">
-                <a16:creationId xmlns:a16="http://schemas.microsoft.com/office/drawing/2014/main" id="{CC48C0ED-6D1F-4093-B533-D6EF41030831}"/>
+                <a16:creationId xmlns:a16="http://schemas.microsoft.com/office/drawing/2014/main" id="{5D3473A2-1CA4-456B-BCA9-CF9887DACAFB}"/>
               </a:ext>
             </a:extLst>
           </p:cNvPr>
@@ -15445,7 +15445,7 @@
           <p:cNvPr id="12" name="p03-n3">
             <a:extLst xmlns:a="http://schemas.openxmlformats.org/drawingml/2006/main">
               <a:ext uri="{FF2B5EF4-FFF2-40B4-BE49-F238E27FC236}">
-                <a16:creationId xmlns:a16="http://schemas.microsoft.com/office/drawing/2014/main" id="{8BC0C916-EF1E-4541-9799-78376DBD43CA}"/>
+                <a16:creationId xmlns:a16="http://schemas.microsoft.com/office/drawing/2014/main" id="{C0B40340-84DF-454E-B384-79FD5D0ECC7C}"/>
               </a:ext>
             </a:extLst>
           </p:cNvPr>
@@ -15502,7 +15502,7 @@
           <p:cNvPr id="13" name="p03-g3">
             <a:extLst xmlns:a="http://schemas.openxmlformats.org/drawingml/2006/main">
               <a:ext uri="{FF2B5EF4-FFF2-40B4-BE49-F238E27FC236}">
-                <a16:creationId xmlns:a16="http://schemas.microsoft.com/office/drawing/2014/main" id="{A9DD4FC0-D6E7-48E5-AA72-6982C33B7ABC}"/>
+                <a16:creationId xmlns:a16="http://schemas.microsoft.com/office/drawing/2014/main" id="{2052D01D-3969-4031-AAAD-3BCD2E6AB90C}"/>
               </a:ext>
             </a:extLst>
           </p:cNvPr>
@@ -15561,7 +15561,7 @@
           <p:cNvPr id="14" name="p03-n4">
             <a:extLst xmlns:a="http://schemas.openxmlformats.org/drawingml/2006/main">
               <a:ext uri="{FF2B5EF4-FFF2-40B4-BE49-F238E27FC236}">
-                <a16:creationId xmlns:a16="http://schemas.microsoft.com/office/drawing/2014/main" id="{19E9DA1F-93B5-4CB9-BBB8-0DE88DAA1AA3}"/>
+                <a16:creationId xmlns:a16="http://schemas.microsoft.com/office/drawing/2014/main" id="{42D3D7C1-22E4-49ED-A6C1-B6D46556B2CB}"/>
               </a:ext>
             </a:extLst>
           </p:cNvPr>
@@ -15618,7 +15618,7 @@
           <p:cNvPr id="15" name="p03-g4">
             <a:extLst xmlns:a="http://schemas.openxmlformats.org/drawingml/2006/main">
               <a:ext uri="{FF2B5EF4-FFF2-40B4-BE49-F238E27FC236}">
-                <a16:creationId xmlns:a16="http://schemas.microsoft.com/office/drawing/2014/main" id="{A48E7B22-9816-4A28-87CE-2DFA4D96E2B3}"/>
+                <a16:creationId xmlns:a16="http://schemas.microsoft.com/office/drawing/2014/main" id="{AC1F02BE-0801-450D-9DE0-CDB8AB903C90}"/>
               </a:ext>
             </a:extLst>
           </p:cNvPr>
@@ -15677,7 +15677,7 @@
           <p:cNvPr id="16" name="p03-n5">
             <a:extLst xmlns:a="http://schemas.openxmlformats.org/drawingml/2006/main">
               <a:ext uri="{FF2B5EF4-FFF2-40B4-BE49-F238E27FC236}">
-                <a16:creationId xmlns:a16="http://schemas.microsoft.com/office/drawing/2014/main" id="{CF88E3CE-934D-49E8-8884-9048ABA6BD08}"/>
+                <a16:creationId xmlns:a16="http://schemas.microsoft.com/office/drawing/2014/main" id="{EAAB08BA-F37E-4BD5-8A1A-7DAB1BE22268}"/>
               </a:ext>
             </a:extLst>
           </p:cNvPr>
@@ -15734,7 +15734,7 @@
           <p:cNvPr id="17" name="p03-g5">
             <a:extLst xmlns:a="http://schemas.openxmlformats.org/drawingml/2006/main">
               <a:ext uri="{FF2B5EF4-FFF2-40B4-BE49-F238E27FC236}">
-                <a16:creationId xmlns:a16="http://schemas.microsoft.com/office/drawing/2014/main" id="{4E9BCE20-AC76-46FD-92D5-CFD90ED2ADE2}"/>
+                <a16:creationId xmlns:a16="http://schemas.microsoft.com/office/drawing/2014/main" id="{1DF3C3D7-9C08-4A65-BD5C-EDF1E50ED855}"/>
               </a:ext>
             </a:extLst>
           </p:cNvPr>
@@ -15793,7 +15793,7 @@
           <p:cNvPr id="18" name="p03-output">
             <a:extLst xmlns:a="http://schemas.openxmlformats.org/drawingml/2006/main">
               <a:ext uri="{FF2B5EF4-FFF2-40B4-BE49-F238E27FC236}">
-                <a16:creationId xmlns:a16="http://schemas.microsoft.com/office/drawing/2014/main" id="{66DC1D7E-93FE-4004-BF11-7324DA2751AF}"/>
+                <a16:creationId xmlns:a16="http://schemas.microsoft.com/office/drawing/2014/main" id="{2102DD86-0368-4C32-AC9D-FC54F0582EEB}"/>
               </a:ext>
             </a:extLst>
           </p:cNvPr>
@@ -15926,7 +15926,7 @@
           <p:cNvPr id="19" name="p03-gate">
             <a:extLst xmlns:a="http://schemas.openxmlformats.org/drawingml/2006/main">
               <a:ext uri="{FF2B5EF4-FFF2-40B4-BE49-F238E27FC236}">
-                <a16:creationId xmlns:a16="http://schemas.microsoft.com/office/drawing/2014/main" id="{68BC6715-139A-4A73-AFD6-B1B0002F003B}"/>
+                <a16:creationId xmlns:a16="http://schemas.microsoft.com/office/drawing/2014/main" id="{1EFA6B63-49BA-46EB-87DF-0F95629808C3}"/>
               </a:ext>
             </a:extLst>
           </p:cNvPr>
@@ -16077,7 +16077,7 @@
           <p:cNvPr id="6" name="p04-h0">
             <a:extLst xmlns:a="http://schemas.openxmlformats.org/drawingml/2006/main">
               <a:ext uri="{FF2B5EF4-FFF2-40B4-BE49-F238E27FC236}">
-                <a16:creationId xmlns:a16="http://schemas.microsoft.com/office/drawing/2014/main" id="{DC7B4CF6-1A9B-46B3-AD05-0AED98C216B8}"/>
+                <a16:creationId xmlns:a16="http://schemas.microsoft.com/office/drawing/2014/main" id="{460F503B-E34B-4BEE-9BEF-F67C8C6837FF}"/>
               </a:ext>
             </a:extLst>
           </p:cNvPr>
@@ -16132,7 +16132,7 @@
           <p:cNvPr id="7" name="p04-h1">
             <a:extLst xmlns:a="http://schemas.openxmlformats.org/drawingml/2006/main">
               <a:ext uri="{FF2B5EF4-FFF2-40B4-BE49-F238E27FC236}">
-                <a16:creationId xmlns:a16="http://schemas.microsoft.com/office/drawing/2014/main" id="{ABCC5797-3DC1-484C-8893-3391EFE48ED5}"/>
+                <a16:creationId xmlns:a16="http://schemas.microsoft.com/office/drawing/2014/main" id="{1DB14D74-5E34-468D-BD59-EF812367FCB6}"/>
               </a:ext>
             </a:extLst>
           </p:cNvPr>
@@ -16187,7 +16187,7 @@
           <p:cNvPr id="8" name="p04-h2">
             <a:extLst xmlns:a="http://schemas.openxmlformats.org/drawingml/2006/main">
               <a:ext uri="{FF2B5EF4-FFF2-40B4-BE49-F238E27FC236}">
-                <a16:creationId xmlns:a16="http://schemas.microsoft.com/office/drawing/2014/main" id="{B3D358B3-EDD9-4AE8-A248-1B8D244A9C67}"/>
+                <a16:creationId xmlns:a16="http://schemas.microsoft.com/office/drawing/2014/main" id="{D6442FB8-5B5F-4C29-8E5B-27250A19D014}"/>
               </a:ext>
             </a:extLst>
           </p:cNvPr>
@@ -16242,7 +16242,7 @@
           <p:cNvPr id="9" name="p04-r0-0">
             <a:extLst xmlns:a="http://schemas.openxmlformats.org/drawingml/2006/main">
               <a:ext uri="{FF2B5EF4-FFF2-40B4-BE49-F238E27FC236}">
-                <a16:creationId xmlns:a16="http://schemas.microsoft.com/office/drawing/2014/main" id="{4EFE2F84-D2A9-4F50-B553-059D9982C0DD}"/>
+                <a16:creationId xmlns:a16="http://schemas.microsoft.com/office/drawing/2014/main" id="{49CC718B-5224-4B63-9181-BD6E5FAAD8EF}"/>
               </a:ext>
             </a:extLst>
           </p:cNvPr>
@@ -16303,7 +16303,7 @@
           <p:cNvPr id="10" name="p04-r0-1">
             <a:extLst xmlns:a="http://schemas.openxmlformats.org/drawingml/2006/main">
               <a:ext uri="{FF2B5EF4-FFF2-40B4-BE49-F238E27FC236}">
-                <a16:creationId xmlns:a16="http://schemas.microsoft.com/office/drawing/2014/main" id="{EFB08624-31F1-46E2-8D85-185BC7DADAA8}"/>
+                <a16:creationId xmlns:a16="http://schemas.microsoft.com/office/drawing/2014/main" id="{B09E0B0A-F65D-4B28-AA3D-FF92F76D47A5}"/>
               </a:ext>
             </a:extLst>
           </p:cNvPr>
@@ -16364,7 +16364,7 @@
           <p:cNvPr id="11" name="p04-r0-2">
             <a:extLst xmlns:a="http://schemas.openxmlformats.org/drawingml/2006/main">
               <a:ext uri="{FF2B5EF4-FFF2-40B4-BE49-F238E27FC236}">
-                <a16:creationId xmlns:a16="http://schemas.microsoft.com/office/drawing/2014/main" id="{08CCB516-6872-48E3-883B-CB6AFE17354F}"/>
+                <a16:creationId xmlns:a16="http://schemas.microsoft.com/office/drawing/2014/main" id="{64478505-21E2-4DB0-BC48-7FEBBF20E3DE}"/>
               </a:ext>
             </a:extLst>
           </p:cNvPr>
@@ -16425,7 +16425,7 @@
           <p:cNvPr id="12" name="p04-r1-0">
             <a:extLst xmlns:a="http://schemas.openxmlformats.org/drawingml/2006/main">
               <a:ext uri="{FF2B5EF4-FFF2-40B4-BE49-F238E27FC236}">
-                <a16:creationId xmlns:a16="http://schemas.microsoft.com/office/drawing/2014/main" id="{1537BB71-D7AB-421A-BE2E-FDF8B87DAA82}"/>
+                <a16:creationId xmlns:a16="http://schemas.microsoft.com/office/drawing/2014/main" id="{6444F965-BF6E-4FD7-99E8-9F10126FC218}"/>
               </a:ext>
             </a:extLst>
           </p:cNvPr>
@@ -16486,7 +16486,7 @@
           <p:cNvPr id="13" name="p04-r1-1">
             <a:extLst xmlns:a="http://schemas.openxmlformats.org/drawingml/2006/main">
               <a:ext uri="{FF2B5EF4-FFF2-40B4-BE49-F238E27FC236}">
-                <a16:creationId xmlns:a16="http://schemas.microsoft.com/office/drawing/2014/main" id="{0C034D5F-37CC-40B6-B998-AFE1FCFC729D}"/>
+                <a16:creationId xmlns:a16="http://schemas.microsoft.com/office/drawing/2014/main" id="{A63B321E-0B42-4D4A-8BF9-6C88DADAC8E1}"/>
               </a:ext>
             </a:extLst>
           </p:cNvPr>
@@ -16547,7 +16547,7 @@
           <p:cNvPr id="14" name="p04-r1-2">
             <a:extLst xmlns:a="http://schemas.openxmlformats.org/drawingml/2006/main">
               <a:ext uri="{FF2B5EF4-FFF2-40B4-BE49-F238E27FC236}">
-                <a16:creationId xmlns:a16="http://schemas.microsoft.com/office/drawing/2014/main" id="{E917E2A0-1131-4581-A9D9-52D51C79B261}"/>
+                <a16:creationId xmlns:a16="http://schemas.microsoft.com/office/drawing/2014/main" id="{C43FA267-A5DC-4385-8EDB-DDC7BBBA13B1}"/>
               </a:ext>
             </a:extLst>
           </p:cNvPr>
@@ -16608,7 +16608,7 @@
           <p:cNvPr id="15" name="p04-r2-0">
             <a:extLst xmlns:a="http://schemas.openxmlformats.org/drawingml/2006/main">
               <a:ext uri="{FF2B5EF4-FFF2-40B4-BE49-F238E27FC236}">
-                <a16:creationId xmlns:a16="http://schemas.microsoft.com/office/drawing/2014/main" id="{C1C7958C-53EA-4016-9BEC-4CD590F4EE7C}"/>
+                <a16:creationId xmlns:a16="http://schemas.microsoft.com/office/drawing/2014/main" id="{4533C521-FD69-48F2-986A-C80459E04100}"/>
               </a:ext>
             </a:extLst>
           </p:cNvPr>
@@ -16669,7 +16669,7 @@
           <p:cNvPr id="16" name="p04-r2-1">
             <a:extLst xmlns:a="http://schemas.openxmlformats.org/drawingml/2006/main">
               <a:ext uri="{FF2B5EF4-FFF2-40B4-BE49-F238E27FC236}">
-                <a16:creationId xmlns:a16="http://schemas.microsoft.com/office/drawing/2014/main" id="{C24B9C35-0ED0-4064-B8AA-5588C3D6F665}"/>
+                <a16:creationId xmlns:a16="http://schemas.microsoft.com/office/drawing/2014/main" id="{2EF006DD-F639-476C-948A-E06853C0AB2F}"/>
               </a:ext>
             </a:extLst>
           </p:cNvPr>
@@ -16730,7 +16730,7 @@
           <p:cNvPr id="17" name="p04-r2-2">
             <a:extLst xmlns:a="http://schemas.openxmlformats.org/drawingml/2006/main">
               <a:ext uri="{FF2B5EF4-FFF2-40B4-BE49-F238E27FC236}">
-                <a16:creationId xmlns:a16="http://schemas.microsoft.com/office/drawing/2014/main" id="{4DE5A93D-846B-48C0-8746-3683E7A0E15B}"/>
+                <a16:creationId xmlns:a16="http://schemas.microsoft.com/office/drawing/2014/main" id="{B86BD58B-91C3-4AF9-B19F-49361E377BB9}"/>
               </a:ext>
             </a:extLst>
           </p:cNvPr>
@@ -16791,7 +16791,7 @@
           <p:cNvPr id="18" name="p04-bottom">
             <a:extLst xmlns:a="http://schemas.openxmlformats.org/drawingml/2006/main">
               <a:ext uri="{FF2B5EF4-FFF2-40B4-BE49-F238E27FC236}">
-                <a16:creationId xmlns:a16="http://schemas.microsoft.com/office/drawing/2014/main" id="{09F291F0-5E24-4461-BBFE-501DC1EB59AD}"/>
+                <a16:creationId xmlns:a16="http://schemas.microsoft.com/office/drawing/2014/main" id="{D7443028-9B55-41DD-BA35-BDE4B09D2AB7}"/>
               </a:ext>
             </a:extLst>
           </p:cNvPr>
@@ -16936,7 +16936,7 @@
           <p:cNvPr id="6" name="p05-virtual">
             <a:extLst xmlns:a="http://schemas.openxmlformats.org/drawingml/2006/main">
               <a:ext uri="{FF2B5EF4-FFF2-40B4-BE49-F238E27FC236}">
-                <a16:creationId xmlns:a16="http://schemas.microsoft.com/office/drawing/2014/main" id="{A430DD6C-B7EF-46C8-BA28-D9F943A02C66}"/>
+                <a16:creationId xmlns:a16="http://schemas.microsoft.com/office/drawing/2014/main" id="{2220FCC1-DF5B-446C-BBB7-52A71F89207C}"/>
               </a:ext>
             </a:extLst>
           </p:cNvPr>
@@ -16993,7 +16993,7 @@
           <p:cNvPr id="7" name="p05-gap">
             <a:extLst xmlns:a="http://schemas.openxmlformats.org/drawingml/2006/main">
               <a:ext uri="{FF2B5EF4-FFF2-40B4-BE49-F238E27FC236}">
-                <a16:creationId xmlns:a16="http://schemas.microsoft.com/office/drawing/2014/main" id="{15C70E5B-E303-4C35-A722-C68B39E7335D}"/>
+                <a16:creationId xmlns:a16="http://schemas.microsoft.com/office/drawing/2014/main" id="{0D83D5D9-AD9A-498C-BC0E-09D8EF034B90}"/>
               </a:ext>
             </a:extLst>
           </p:cNvPr>
@@ -17104,7 +17104,7 @@
           <p:cNvPr id="8" name="p05-a">
             <a:extLst xmlns:a="http://schemas.openxmlformats.org/drawingml/2006/main">
               <a:ext uri="{FF2B5EF4-FFF2-40B4-BE49-F238E27FC236}">
-                <a16:creationId xmlns:a16="http://schemas.microsoft.com/office/drawing/2014/main" id="{54460272-CE55-45A9-8992-5322A7064523}"/>
+                <a16:creationId xmlns:a16="http://schemas.microsoft.com/office/drawing/2014/main" id="{B33A3182-C0D0-4298-9D1A-5459466AF410}"/>
               </a:ext>
             </a:extLst>
           </p:cNvPr>
@@ -17157,7 +17157,7 @@
           <p:cNvPr id="9" name="p05-q">
             <a:extLst xmlns:a="http://schemas.openxmlformats.org/drawingml/2006/main">
               <a:ext uri="{FF2B5EF4-FFF2-40B4-BE49-F238E27FC236}">
-                <a16:creationId xmlns:a16="http://schemas.microsoft.com/office/drawing/2014/main" id="{BF149394-3979-4378-A707-47648015A18B}"/>
+                <a16:creationId xmlns:a16="http://schemas.microsoft.com/office/drawing/2014/main" id="{D21C16E8-6D6B-44B4-8B1E-910950698065}"/>
               </a:ext>
             </a:extLst>
           </p:cNvPr>
@@ -17220,7 +17220,7 @@
           <p:cNvPr id="10" name="p05-e0">
             <a:extLst xmlns:a="http://schemas.openxmlformats.org/drawingml/2006/main">
               <a:ext uri="{FF2B5EF4-FFF2-40B4-BE49-F238E27FC236}">
-                <a16:creationId xmlns:a16="http://schemas.microsoft.com/office/drawing/2014/main" id="{7595C5E1-AF2F-47F6-B628-C1FEC2D058AD}"/>
+                <a16:creationId xmlns:a16="http://schemas.microsoft.com/office/drawing/2014/main" id="{0F17FB5A-27F6-46BD-8072-EA37B5EC62C2}"/>
               </a:ext>
             </a:extLst>
           </p:cNvPr>
@@ -17277,7 +17277,7 @@
           <p:cNvPr id="11" name="p05-e1">
             <a:extLst xmlns:a="http://schemas.openxmlformats.org/drawingml/2006/main">
               <a:ext uri="{FF2B5EF4-FFF2-40B4-BE49-F238E27FC236}">
-                <a16:creationId xmlns:a16="http://schemas.microsoft.com/office/drawing/2014/main" id="{12B950CF-3B2F-4CB5-917A-5AD02D515E4A}"/>
+                <a16:creationId xmlns:a16="http://schemas.microsoft.com/office/drawing/2014/main" id="{D72C1AB8-ACE8-470D-AD6F-919B6363D1FC}"/>
               </a:ext>
             </a:extLst>
           </p:cNvPr>
@@ -17334,7 +17334,7 @@
           <p:cNvPr id="12" name="p05-e2">
             <a:extLst xmlns:a="http://schemas.openxmlformats.org/drawingml/2006/main">
               <a:ext uri="{FF2B5EF4-FFF2-40B4-BE49-F238E27FC236}">
-                <a16:creationId xmlns:a16="http://schemas.microsoft.com/office/drawing/2014/main" id="{A6047853-106C-4B0E-B2A4-3C9F0C6D62D7}"/>
+                <a16:creationId xmlns:a16="http://schemas.microsoft.com/office/drawing/2014/main" id="{5529DF65-3F7F-4443-89B9-9177F7F4B737}"/>
               </a:ext>
             </a:extLst>
           </p:cNvPr>
@@ -17391,7 +17391,7 @@
           <p:cNvPr id="13" name="p05-e3">
             <a:extLst xmlns:a="http://schemas.openxmlformats.org/drawingml/2006/main">
               <a:ext uri="{FF2B5EF4-FFF2-40B4-BE49-F238E27FC236}">
-                <a16:creationId xmlns:a16="http://schemas.microsoft.com/office/drawing/2014/main" id="{FD0E1C88-4C48-4FF0-AB29-7F39ED911C86}"/>
+                <a16:creationId xmlns:a16="http://schemas.microsoft.com/office/drawing/2014/main" id="{0E5119D6-7380-4B4E-856E-CC7AF8B91BDF}"/>
               </a:ext>
             </a:extLst>
           </p:cNvPr>
@@ -17448,7 +17448,7 @@
           <p:cNvPr id="14" name="p05-e4">
             <a:extLst xmlns:a="http://schemas.openxmlformats.org/drawingml/2006/main">
               <a:ext uri="{FF2B5EF4-FFF2-40B4-BE49-F238E27FC236}">
-                <a16:creationId xmlns:a16="http://schemas.microsoft.com/office/drawing/2014/main" id="{0446E219-5925-439D-BD30-00D4290DCDFA}"/>
+                <a16:creationId xmlns:a16="http://schemas.microsoft.com/office/drawing/2014/main" id="{66CCE19D-79A4-43B5-B60E-FAE35CC9B57F}"/>
               </a:ext>
             </a:extLst>
           </p:cNvPr>
@@ -17505,7 +17505,7 @@
           <p:cNvPr id="15" name="p05-bottom">
             <a:extLst xmlns:a="http://schemas.openxmlformats.org/drawingml/2006/main">
               <a:ext uri="{FF2B5EF4-FFF2-40B4-BE49-F238E27FC236}">
-                <a16:creationId xmlns:a16="http://schemas.microsoft.com/office/drawing/2014/main" id="{722E5326-277F-4F3C-A0B8-26E03F1AFA15}"/>
+                <a16:creationId xmlns:a16="http://schemas.microsoft.com/office/drawing/2014/main" id="{50938973-8F49-4454-A917-EF20FC4FFB72}"/>
               </a:ext>
             </a:extLst>
           </p:cNvPr>
@@ -17650,7 +17650,7 @@
           <p:cNvPr id="6" name="p06-so-h">
             <a:extLst xmlns:a="http://schemas.openxmlformats.org/drawingml/2006/main">
               <a:ext uri="{FF2B5EF4-FFF2-40B4-BE49-F238E27FC236}">
-                <a16:creationId xmlns:a16="http://schemas.microsoft.com/office/drawing/2014/main" id="{9FF2AEE9-44AC-43FD-A124-456A201DF185}"/>
+                <a16:creationId xmlns:a16="http://schemas.microsoft.com/office/drawing/2014/main" id="{5B5F033A-1458-4832-A378-48705745EBB7}"/>
               </a:ext>
             </a:extLst>
           </p:cNvPr>
@@ -17707,7 +17707,7 @@
           <p:cNvPr id="7" name="p06-so-d">
             <a:extLst xmlns:a="http://schemas.openxmlformats.org/drawingml/2006/main">
               <a:ext uri="{FF2B5EF4-FFF2-40B4-BE49-F238E27FC236}">
-                <a16:creationId xmlns:a16="http://schemas.microsoft.com/office/drawing/2014/main" id="{320C8546-C8C7-4316-9073-8402CBA73B7A}"/>
+                <a16:creationId xmlns:a16="http://schemas.microsoft.com/office/drawing/2014/main" id="{BE888419-918C-460B-A4D9-31B58F5E4382}"/>
               </a:ext>
             </a:extLst>
           </p:cNvPr>
@@ -17799,7 +17799,7 @@
           <p:cNvPr id="8" name="p06-who-h">
             <a:extLst xmlns:a="http://schemas.openxmlformats.org/drawingml/2006/main">
               <a:ext uri="{FF2B5EF4-FFF2-40B4-BE49-F238E27FC236}">
-                <a16:creationId xmlns:a16="http://schemas.microsoft.com/office/drawing/2014/main" id="{A3E90AD5-D0FD-4C37-8DB2-01ECF30F2511}"/>
+                <a16:creationId xmlns:a16="http://schemas.microsoft.com/office/drawing/2014/main" id="{23AB2EE4-3083-4EF1-B2FB-D94283D188C2}"/>
               </a:ext>
             </a:extLst>
           </p:cNvPr>
@@ -17856,7 +17856,7 @@
           <p:cNvPr id="9" name="p06-who-d">
             <a:extLst xmlns:a="http://schemas.openxmlformats.org/drawingml/2006/main">
               <a:ext uri="{FF2B5EF4-FFF2-40B4-BE49-F238E27FC236}">
-                <a16:creationId xmlns:a16="http://schemas.microsoft.com/office/drawing/2014/main" id="{2D82E2C9-86E0-4156-AF78-46FA3890E1EE}"/>
+                <a16:creationId xmlns:a16="http://schemas.microsoft.com/office/drawing/2014/main" id="{3791D4CF-0F5E-4CCF-9BF8-6D4FC46DDA85}"/>
               </a:ext>
             </a:extLst>
           </p:cNvPr>
@@ -17948,7 +17948,7 @@
           <p:cNvPr id="10" name="p06-example">
             <a:extLst xmlns:a="http://schemas.openxmlformats.org/drawingml/2006/main">
               <a:ext uri="{FF2B5EF4-FFF2-40B4-BE49-F238E27FC236}">
-                <a16:creationId xmlns:a16="http://schemas.microsoft.com/office/drawing/2014/main" id="{63A8A711-88B4-4599-91EF-41B49F820B42}"/>
+                <a16:creationId xmlns:a16="http://schemas.microsoft.com/office/drawing/2014/main" id="{56B54118-7E5C-467E-87B2-E74A01132007}"/>
               </a:ext>
             </a:extLst>
           </p:cNvPr>
@@ -18099,7 +18099,7 @@
           <p:cNvPr id="6" name="p07-scope">
             <a:extLst xmlns:a="http://schemas.openxmlformats.org/drawingml/2006/main">
               <a:ext uri="{FF2B5EF4-FFF2-40B4-BE49-F238E27FC236}">
-                <a16:creationId xmlns:a16="http://schemas.microsoft.com/office/drawing/2014/main" id="{2370A538-457B-4A86-9EB2-C4656BF6276D}"/>
+                <a16:creationId xmlns:a16="http://schemas.microsoft.com/office/drawing/2014/main" id="{5F39B7A8-3AA2-48DC-84E0-8A7B70981590}"/>
               </a:ext>
             </a:extLst>
           </p:cNvPr>
@@ -18154,7 +18154,7 @@
           <p:cNvPr id="7" name="p07-in0">
             <a:extLst xmlns:a="http://schemas.openxmlformats.org/drawingml/2006/main">
               <a:ext uri="{FF2B5EF4-FFF2-40B4-BE49-F238E27FC236}">
-                <a16:creationId xmlns:a16="http://schemas.microsoft.com/office/drawing/2014/main" id="{6D370C0E-4598-4F3A-95B0-8F9E3AF62AC4}"/>
+                <a16:creationId xmlns:a16="http://schemas.microsoft.com/office/drawing/2014/main" id="{5AA9E125-2860-4BCA-89CA-13399589704D}"/>
               </a:ext>
             </a:extLst>
           </p:cNvPr>
@@ -18213,7 +18213,7 @@
           <p:cNvPr id="8" name="p07-in1">
             <a:extLst xmlns:a="http://schemas.openxmlformats.org/drawingml/2006/main">
               <a:ext uri="{FF2B5EF4-FFF2-40B4-BE49-F238E27FC236}">
-                <a16:creationId xmlns:a16="http://schemas.microsoft.com/office/drawing/2014/main" id="{AB1E8946-7620-427D-8D17-1915E164B082}"/>
+                <a16:creationId xmlns:a16="http://schemas.microsoft.com/office/drawing/2014/main" id="{8362C2C4-C5DC-4EA7-BD8E-C0513CF232C2}"/>
               </a:ext>
             </a:extLst>
           </p:cNvPr>
@@ -18272,7 +18272,7 @@
           <p:cNvPr id="9" name="p07-in2">
             <a:extLst xmlns:a="http://schemas.openxmlformats.org/drawingml/2006/main">
               <a:ext uri="{FF2B5EF4-FFF2-40B4-BE49-F238E27FC236}">
-                <a16:creationId xmlns:a16="http://schemas.microsoft.com/office/drawing/2014/main" id="{87270BDF-2E0C-4376-A502-5B5DAFAE5D75}"/>
+                <a16:creationId xmlns:a16="http://schemas.microsoft.com/office/drawing/2014/main" id="{CA1A90C1-5488-4808-9D73-26CB91103F6C}"/>
               </a:ext>
             </a:extLst>
           </p:cNvPr>
@@ -18331,7 +18331,7 @@
           <p:cNvPr id="10" name="p07-non">
             <a:extLst xmlns:a="http://schemas.openxmlformats.org/drawingml/2006/main">
               <a:ext uri="{FF2B5EF4-FFF2-40B4-BE49-F238E27FC236}">
-                <a16:creationId xmlns:a16="http://schemas.microsoft.com/office/drawing/2014/main" id="{DEC83067-7B93-4838-9994-35DE93F89030}"/>
+                <a16:creationId xmlns:a16="http://schemas.microsoft.com/office/drawing/2014/main" id="{B986F5B1-CAB8-41A4-B977-D6614749D5E3}"/>
               </a:ext>
             </a:extLst>
           </p:cNvPr>
@@ -18386,7 +18386,7 @@
           <p:cNvPr id="11" name="p07-out0">
             <a:extLst xmlns:a="http://schemas.openxmlformats.org/drawingml/2006/main">
               <a:ext uri="{FF2B5EF4-FFF2-40B4-BE49-F238E27FC236}">
-                <a16:creationId xmlns:a16="http://schemas.microsoft.com/office/drawing/2014/main" id="{FF5D0FFB-E4E7-43A7-93A3-BD14910E7A9A}"/>
+                <a16:creationId xmlns:a16="http://schemas.microsoft.com/office/drawing/2014/main" id="{8A14F7F5-1490-4286-A1C1-C15F86BD671E}"/>
               </a:ext>
             </a:extLst>
           </p:cNvPr>
@@ -18445,7 +18445,7 @@
           <p:cNvPr id="12" name="p07-out1">
             <a:extLst xmlns:a="http://schemas.openxmlformats.org/drawingml/2006/main">
               <a:ext uri="{FF2B5EF4-FFF2-40B4-BE49-F238E27FC236}">
-                <a16:creationId xmlns:a16="http://schemas.microsoft.com/office/drawing/2014/main" id="{B2C80565-DD84-4506-AE7B-BCE96ED6D4A0}"/>
+                <a16:creationId xmlns:a16="http://schemas.microsoft.com/office/drawing/2014/main" id="{72F63A57-7605-4C9A-9A99-4877B4DD7918}"/>
               </a:ext>
             </a:extLst>
           </p:cNvPr>
@@ -18504,7 +18504,7 @@
           <p:cNvPr id="13" name="p07-out2">
             <a:extLst xmlns:a="http://schemas.openxmlformats.org/drawingml/2006/main">
               <a:ext uri="{FF2B5EF4-FFF2-40B4-BE49-F238E27FC236}">
-                <a16:creationId xmlns:a16="http://schemas.microsoft.com/office/drawing/2014/main" id="{A9A2A716-EC97-414C-84CA-74DA87B37E7A}"/>
+                <a16:creationId xmlns:a16="http://schemas.microsoft.com/office/drawing/2014/main" id="{D2A9CCBC-0873-4634-802D-7A1594DABB11}"/>
               </a:ext>
             </a:extLst>
           </p:cNvPr>
@@ -18563,7 +18563,7 @@
           <p:cNvPr id="14" name="p07-boundary">
             <a:extLst xmlns:a="http://schemas.openxmlformats.org/drawingml/2006/main">
               <a:ext uri="{FF2B5EF4-FFF2-40B4-BE49-F238E27FC236}">
-                <a16:creationId xmlns:a16="http://schemas.microsoft.com/office/drawing/2014/main" id="{2BF83377-70B7-4615-9B26-133CE39DA7D1}"/>
+                <a16:creationId xmlns:a16="http://schemas.microsoft.com/office/drawing/2014/main" id="{B105E8CF-42BA-4A4B-B9A0-11FD818F6CD9}"/>
               </a:ext>
             </a:extLst>
           </p:cNvPr>
@@ -18620,7 +18620,7 @@
           <p:cNvPr id="15" name="p07-bottom">
             <a:extLst xmlns:a="http://schemas.openxmlformats.org/drawingml/2006/main">
               <a:ext uri="{FF2B5EF4-FFF2-40B4-BE49-F238E27FC236}">
-                <a16:creationId xmlns:a16="http://schemas.microsoft.com/office/drawing/2014/main" id="{2ED76CDB-2E2F-43D1-8A1C-ADB8D1B2EF6B}"/>
+                <a16:creationId xmlns:a16="http://schemas.microsoft.com/office/drawing/2014/main" id="{2AF6764F-5495-4449-889F-D951585E5496}"/>
               </a:ext>
             </a:extLst>
           </p:cNvPr>
@@ -18765,7 +18765,7 @@
           <p:cNvPr id="6" name="p08-0-h">
             <a:extLst xmlns:a="http://schemas.openxmlformats.org/drawingml/2006/main">
               <a:ext uri="{FF2B5EF4-FFF2-40B4-BE49-F238E27FC236}">
-                <a16:creationId xmlns:a16="http://schemas.microsoft.com/office/drawing/2014/main" id="{DE379BF7-0789-4EE7-9DCE-6B8035B32F3A}"/>
+                <a16:creationId xmlns:a16="http://schemas.microsoft.com/office/drawing/2014/main" id="{2C3AD09C-C93C-4184-992D-B622F0FA90F6}"/>
               </a:ext>
             </a:extLst>
           </p:cNvPr>
@@ -18822,7 +18822,7 @@
           <p:cNvPr id="7" name="p08-0-d">
             <a:extLst xmlns:a="http://schemas.openxmlformats.org/drawingml/2006/main">
               <a:ext uri="{FF2B5EF4-FFF2-40B4-BE49-F238E27FC236}">
-                <a16:creationId xmlns:a16="http://schemas.microsoft.com/office/drawing/2014/main" id="{06413A3D-5764-4C1D-81F1-C6324257A982}"/>
+                <a16:creationId xmlns:a16="http://schemas.microsoft.com/office/drawing/2014/main" id="{CEF291DB-48A9-4945-B831-EC0315D1D550}"/>
               </a:ext>
             </a:extLst>
           </p:cNvPr>
@@ -18914,7 +18914,7 @@
           <p:cNvPr id="8" name="p08-1-h">
             <a:extLst xmlns:a="http://schemas.openxmlformats.org/drawingml/2006/main">
               <a:ext uri="{FF2B5EF4-FFF2-40B4-BE49-F238E27FC236}">
-                <a16:creationId xmlns:a16="http://schemas.microsoft.com/office/drawing/2014/main" id="{F11D4B69-CF11-4768-A86D-3558A907C99F}"/>
+                <a16:creationId xmlns:a16="http://schemas.microsoft.com/office/drawing/2014/main" id="{6452CA8C-3978-4A86-886D-3713F7957943}"/>
               </a:ext>
             </a:extLst>
           </p:cNvPr>
@@ -18971,7 +18971,7 @@
           <p:cNvPr id="9" name="p08-1-d">
             <a:extLst xmlns:a="http://schemas.openxmlformats.org/drawingml/2006/main">
               <a:ext uri="{FF2B5EF4-FFF2-40B4-BE49-F238E27FC236}">
-                <a16:creationId xmlns:a16="http://schemas.microsoft.com/office/drawing/2014/main" id="{B4F9406F-C14E-4715-814F-AF125A5C4D40}"/>
+                <a16:creationId xmlns:a16="http://schemas.microsoft.com/office/drawing/2014/main" id="{D87AD400-C689-4AF5-BED8-69560C487A37}"/>
               </a:ext>
             </a:extLst>
           </p:cNvPr>
@@ -19063,7 +19063,7 @@
           <p:cNvPr id="10" name="p08-2-h">
             <a:extLst xmlns:a="http://schemas.openxmlformats.org/drawingml/2006/main">
               <a:ext uri="{FF2B5EF4-FFF2-40B4-BE49-F238E27FC236}">
-                <a16:creationId xmlns:a16="http://schemas.microsoft.com/office/drawing/2014/main" id="{4020EF9F-786C-4D02-A098-A87B68E90019}"/>
+                <a16:creationId xmlns:a16="http://schemas.microsoft.com/office/drawing/2014/main" id="{34005588-F711-430C-82CE-86B0843F00C7}"/>
               </a:ext>
             </a:extLst>
           </p:cNvPr>
@@ -19120,7 +19120,7 @@
           <p:cNvPr id="11" name="p08-2-d">
             <a:extLst xmlns:a="http://schemas.openxmlformats.org/drawingml/2006/main">
               <a:ext uri="{FF2B5EF4-FFF2-40B4-BE49-F238E27FC236}">
-                <a16:creationId xmlns:a16="http://schemas.microsoft.com/office/drawing/2014/main" id="{2266C000-EF20-4B49-934F-D0087E76413A}"/>
+                <a16:creationId xmlns:a16="http://schemas.microsoft.com/office/drawing/2014/main" id="{E1B08999-491E-4C4A-8CC1-8D6F13288DA6}"/>
               </a:ext>
             </a:extLst>
           </p:cNvPr>
@@ -19212,7 +19212,7 @@
           <p:cNvPr id="12" name="p08-test">
             <a:extLst xmlns:a="http://schemas.openxmlformats.org/drawingml/2006/main">
               <a:ext uri="{FF2B5EF4-FFF2-40B4-BE49-F238E27FC236}">
-                <a16:creationId xmlns:a16="http://schemas.microsoft.com/office/drawing/2014/main" id="{26410501-F230-40FD-9A83-3EECA7D70757}"/>
+                <a16:creationId xmlns:a16="http://schemas.microsoft.com/office/drawing/2014/main" id="{F65775BA-2D76-4490-83E7-BEA0FD495450}"/>
               </a:ext>
             </a:extLst>
           </p:cNvPr>
@@ -19363,7 +19363,7 @@
           <p:cNvPr id="6" name="p09-bad">
             <a:extLst xmlns:a="http://schemas.openxmlformats.org/drawingml/2006/main">
               <a:ext uri="{FF2B5EF4-FFF2-40B4-BE49-F238E27FC236}">
-                <a16:creationId xmlns:a16="http://schemas.microsoft.com/office/drawing/2014/main" id="{4046FB51-446F-4E37-88AB-C3B3A77C61A1}"/>
+                <a16:creationId xmlns:a16="http://schemas.microsoft.com/office/drawing/2014/main" id="{3B6712BC-3452-459F-A70F-06F6F8EB39C1}"/>
               </a:ext>
             </a:extLst>
           </p:cNvPr>
@@ -19442,7 +19442,7 @@
           <p:cNvPr id="7" name="p09-a">
             <a:extLst xmlns:a="http://schemas.openxmlformats.org/drawingml/2006/main">
               <a:ext uri="{FF2B5EF4-FFF2-40B4-BE49-F238E27FC236}">
-                <a16:creationId xmlns:a16="http://schemas.microsoft.com/office/drawing/2014/main" id="{C305DC05-8397-44C3-BB3A-486373334EF5}"/>
+                <a16:creationId xmlns:a16="http://schemas.microsoft.com/office/drawing/2014/main" id="{BEC00720-9EEB-493D-9697-5A19432D7883}"/>
               </a:ext>
             </a:extLst>
           </p:cNvPr>
@@ -19495,7 +19495,7 @@
           <p:cNvPr id="8" name="p09-good">
             <a:extLst xmlns:a="http://schemas.openxmlformats.org/drawingml/2006/main">
               <a:ext uri="{FF2B5EF4-FFF2-40B4-BE49-F238E27FC236}">
-                <a16:creationId xmlns:a16="http://schemas.microsoft.com/office/drawing/2014/main" id="{4E8A6568-9CB0-426D-B57A-9B341444BBD8}"/>
+                <a16:creationId xmlns:a16="http://schemas.microsoft.com/office/drawing/2014/main" id="{D9C5A6B0-A92F-499A-9F17-4C05050BACCC}"/>
               </a:ext>
             </a:extLst>
           </p:cNvPr>
@@ -19582,7 +19582,7 @@
           <p:cNvPr id="9" name="p09-e0">
             <a:extLst xmlns:a="http://schemas.openxmlformats.org/drawingml/2006/main">
               <a:ext uri="{FF2B5EF4-FFF2-40B4-BE49-F238E27FC236}">
-                <a16:creationId xmlns:a16="http://schemas.microsoft.com/office/drawing/2014/main" id="{4DCE24B9-80C4-40D0-A45D-5A7CEDBA7835}"/>
+                <a16:creationId xmlns:a16="http://schemas.microsoft.com/office/drawing/2014/main" id="{B9F414DF-9568-466B-B974-C3EBE4BDF35F}"/>
               </a:ext>
             </a:extLst>
           </p:cNvPr>
@@ -19639,7 +19639,7 @@
           <p:cNvPr id="10" name="p09-e1">
             <a:extLst xmlns:a="http://schemas.openxmlformats.org/drawingml/2006/main">
               <a:ext uri="{FF2B5EF4-FFF2-40B4-BE49-F238E27FC236}">
-                <a16:creationId xmlns:a16="http://schemas.microsoft.com/office/drawing/2014/main" id="{FC399E88-E427-4796-91C8-A33FC7D85AA6}"/>
+                <a16:creationId xmlns:a16="http://schemas.microsoft.com/office/drawing/2014/main" id="{3835F2FC-FB5C-4EB2-9AD1-5B4FB59C9A6E}"/>
               </a:ext>
             </a:extLst>
           </p:cNvPr>
@@ -19696,7 +19696,7 @@
           <p:cNvPr id="11" name="p09-e2">
             <a:extLst xmlns:a="http://schemas.openxmlformats.org/drawingml/2006/main">
               <a:ext uri="{FF2B5EF4-FFF2-40B4-BE49-F238E27FC236}">
-                <a16:creationId xmlns:a16="http://schemas.microsoft.com/office/drawing/2014/main" id="{6C1B6C04-30FC-4EE4-AE8A-CDC9E529ADBB}"/>
+                <a16:creationId xmlns:a16="http://schemas.microsoft.com/office/drawing/2014/main" id="{FDF14209-4229-4F45-9B2A-08B6DAAE2892}"/>
               </a:ext>
             </a:extLst>
           </p:cNvPr>
@@ -19753,7 +19753,7 @@
           <p:cNvPr id="12" name="p09-e3">
             <a:extLst xmlns:a="http://schemas.openxmlformats.org/drawingml/2006/main">
               <a:ext uri="{FF2B5EF4-FFF2-40B4-BE49-F238E27FC236}">
-                <a16:creationId xmlns:a16="http://schemas.microsoft.com/office/drawing/2014/main" id="{0729020B-C770-4A46-9A8D-2382B094BC39}"/>
+                <a16:creationId xmlns:a16="http://schemas.microsoft.com/office/drawing/2014/main" id="{3975266A-4542-4DDA-99E8-A76A73F6AAE3}"/>
               </a:ext>
             </a:extLst>
           </p:cNvPr>
@@ -19810,7 +19810,7 @@
           <p:cNvPr id="13" name="p09-e4">
             <a:extLst xmlns:a="http://schemas.openxmlformats.org/drawingml/2006/main">
               <a:ext uri="{FF2B5EF4-FFF2-40B4-BE49-F238E27FC236}">
-                <a16:creationId xmlns:a16="http://schemas.microsoft.com/office/drawing/2014/main" id="{31543A1B-02F1-45D6-891D-A6ACDBE5902A}"/>
+                <a16:creationId xmlns:a16="http://schemas.microsoft.com/office/drawing/2014/main" id="{5A4E61C0-A8D1-4F82-BA3A-F6816E84F54D}"/>
               </a:ext>
             </a:extLst>
           </p:cNvPr>
@@ -19867,7 +19867,7 @@
           <p:cNvPr id="14" name="p09-bottom">
             <a:extLst xmlns:a="http://schemas.openxmlformats.org/drawingml/2006/main">
               <a:ext uri="{FF2B5EF4-FFF2-40B4-BE49-F238E27FC236}">
-                <a16:creationId xmlns:a16="http://schemas.microsoft.com/office/drawing/2014/main" id="{F5041D7C-6C58-456E-A12E-D894EA297C2E}"/>
+                <a16:creationId xmlns:a16="http://schemas.microsoft.com/office/drawing/2014/main" id="{79C353C9-9A4E-4B5F-8CFC-C70DC40A505F}"/>
               </a:ext>
             </a:extLst>
           </p:cNvPr>
